--- a/dup_project/02_Презентация/ДУП_Приоритеты_реинжиниринга_презентация.pptx
+++ b/dup_project/02_Презентация/ДУП_Приоритеты_реинжиниринга_презентация.pptx
@@ -24144,8 +24144,8 @@
         </p:nvSpPr>
         <p:spPr>
           <a:xfrm>
-            <a:off x="397125" y="1110000"/>
-            <a:ext cx="1982437" cy="460000"/>
+            <a:off x="397125" y="1070000"/>
+            <a:ext cx="1982437" cy="420000"/>
           </a:xfrm>
           <a:prstGeom prst="roundRect">
             <a:avLst>
@@ -24206,8 +24206,8 @@
         </p:nvSpPr>
         <p:spPr>
           <a:xfrm>
-            <a:off x="397125" y="1590000"/>
-            <a:ext cx="1982437" cy="1560000"/>
+            <a:off x="397125" y="1510000"/>
+            <a:ext cx="1982437" cy="1180000"/>
           </a:xfrm>
           <a:prstGeom prst="roundRect">
             <a:avLst>
@@ -24287,8 +24287,8 @@
         </p:nvSpPr>
         <p:spPr>
           <a:xfrm>
-            <a:off x="397125" y="3210000"/>
-            <a:ext cx="1982437" cy="400000"/>
+            <a:off x="397125" y="2750000"/>
+            <a:ext cx="1982437" cy="360000"/>
           </a:xfrm>
           <a:prstGeom prst="roundRect">
             <a:avLst>
@@ -24351,8 +24351,8 @@
         </p:nvSpPr>
         <p:spPr>
           <a:xfrm>
-            <a:off x="2519562" y="1110000"/>
-            <a:ext cx="1982437" cy="460000"/>
+            <a:off x="2519562" y="1070000"/>
+            <a:ext cx="1982437" cy="420000"/>
           </a:xfrm>
           <a:prstGeom prst="roundRect">
             <a:avLst>
@@ -24413,8 +24413,8 @@
         </p:nvSpPr>
         <p:spPr>
           <a:xfrm>
-            <a:off x="2519562" y="1590000"/>
-            <a:ext cx="1982437" cy="1560000"/>
+            <a:off x="2519562" y="1510000"/>
+            <a:ext cx="1982437" cy="1180000"/>
           </a:xfrm>
           <a:prstGeom prst="roundRect">
             <a:avLst>
@@ -24494,8 +24494,8 @@
         </p:nvSpPr>
         <p:spPr>
           <a:xfrm>
-            <a:off x="2519562" y="3210000"/>
-            <a:ext cx="1982437" cy="400000"/>
+            <a:off x="2519562" y="2750000"/>
+            <a:ext cx="1982437" cy="360000"/>
           </a:xfrm>
           <a:prstGeom prst="roundRect">
             <a:avLst>
@@ -24558,8 +24558,8 @@
         </p:nvSpPr>
         <p:spPr>
           <a:xfrm>
-            <a:off x="4641999" y="1110000"/>
-            <a:ext cx="1982437" cy="460000"/>
+            <a:off x="4641999" y="1070000"/>
+            <a:ext cx="1982437" cy="420000"/>
           </a:xfrm>
           <a:prstGeom prst="roundRect">
             <a:avLst>
@@ -24620,8 +24620,8 @@
         </p:nvSpPr>
         <p:spPr>
           <a:xfrm>
-            <a:off x="4641999" y="1590000"/>
-            <a:ext cx="1982437" cy="1560000"/>
+            <a:off x="4641999" y="1510000"/>
+            <a:ext cx="1982437" cy="1180000"/>
           </a:xfrm>
           <a:prstGeom prst="roundRect">
             <a:avLst>
@@ -24701,8 +24701,8 @@
         </p:nvSpPr>
         <p:spPr>
           <a:xfrm>
-            <a:off x="4641999" y="3210000"/>
-            <a:ext cx="1982437" cy="400000"/>
+            <a:off x="4641999" y="2750000"/>
+            <a:ext cx="1982437" cy="360000"/>
           </a:xfrm>
           <a:prstGeom prst="roundRect">
             <a:avLst>
@@ -24765,8 +24765,8 @@
         </p:nvSpPr>
         <p:spPr>
           <a:xfrm>
-            <a:off x="6764436" y="1110000"/>
-            <a:ext cx="1982437" cy="460000"/>
+            <a:off x="6764436" y="1070000"/>
+            <a:ext cx="1982437" cy="420000"/>
           </a:xfrm>
           <a:prstGeom prst="roundRect">
             <a:avLst>
@@ -24827,8 +24827,8 @@
         </p:nvSpPr>
         <p:spPr>
           <a:xfrm>
-            <a:off x="6764436" y="1590000"/>
-            <a:ext cx="1982437" cy="1560000"/>
+            <a:off x="6764436" y="1510000"/>
+            <a:ext cx="1982437" cy="1180000"/>
           </a:xfrm>
           <a:prstGeom prst="roundRect">
             <a:avLst>
@@ -24908,8 +24908,8 @@
         </p:nvSpPr>
         <p:spPr>
           <a:xfrm>
-            <a:off x="6764436" y="3210000"/>
-            <a:ext cx="1982437" cy="400000"/>
+            <a:off x="6764436" y="2750000"/>
+            <a:ext cx="1982437" cy="360000"/>
           </a:xfrm>
           <a:prstGeom prst="roundRect">
             <a:avLst>
@@ -24972,8 +24972,8 @@
         </p:nvSpPr>
         <p:spPr>
           <a:xfrm>
-            <a:off x="397125" y="3730000"/>
-            <a:ext cx="8349750" cy="300000"/>
+            <a:off x="397125" y="3190000"/>
+            <a:ext cx="8349750" cy="250000"/>
           </a:xfrm>
           <a:prstGeom prst="rect">
             <a:avLst/>
@@ -25002,6 +25002,353 @@
                 <a:latin typeface="Golos Text"/>
               </a:rPr>
               <a:t>Отдельно: 3 объекта вне очереди — исполняются другим подразделением целиком, срок контролируется через SLA по родительскому объекту.</a:t>
+            </a:r>
+          </a:p>
+        </p:txBody>
+      </p:sp>
+      <p:sp>
+        <p:nvSpPr>
+          <p:cNvPr id="17" name="Rectangle 16"/>
+          <p:cNvSpPr/>
+          <p:nvPr/>
+        </p:nvSpPr>
+        <p:spPr>
+          <a:xfrm>
+            <a:off x="397125" y="3490000"/>
+            <a:ext cx="8349750" cy="9525"/>
+          </a:xfrm>
+          <a:prstGeom prst="rect">
+            <a:avLst/>
+          </a:prstGeom>
+          <a:solidFill>
+            <a:srgbClr val="D4D8E4"/>
+          </a:solidFill>
+          <a:ln>
+            <a:noFill/>
+          </a:ln>
+          <a:effectLst/>
+        </p:spPr>
+        <p:style>
+          <a:lnRef idx="1">
+            <a:schemeClr val="accent1"/>
+          </a:lnRef>
+          <a:fillRef idx="3">
+            <a:schemeClr val="accent1"/>
+          </a:fillRef>
+          <a:effectRef idx="2">
+            <a:schemeClr val="accent1"/>
+          </a:effectRef>
+          <a:fontRef idx="minor">
+            <a:schemeClr val="lt1"/>
+          </a:fontRef>
+        </p:style>
+        <p:txBody>
+          <a:bodyPr rtlCol="0" anchor="ctr"/>
+          <a:lstStyle/>
+          <a:p>
+            <a:pPr algn="ctr"/>
+          </a:p>
+        </p:txBody>
+      </p:sp>
+      <p:sp>
+        <p:nvSpPr>
+          <p:cNvPr id="18" name="TextBox 17"/>
+          <p:cNvSpPr txBox="1"/>
+          <p:nvPr/>
+        </p:nvSpPr>
+        <p:spPr>
+          <a:xfrm>
+            <a:off x="397125" y="3520000"/>
+            <a:ext cx="8349750" cy="250000"/>
+          </a:xfrm>
+          <a:prstGeom prst="rect">
+            <a:avLst/>
+          </a:prstGeom>
+          <a:noFill/>
+        </p:spPr>
+        <p:txBody>
+          <a:bodyPr wrap="square" lIns="0" rIns="0" tIns="0" bIns="0" anchor="t">
+            <a:spAutoFit/>
+          </a:bodyPr>
+          <a:lstStyle/>
+          <a:p>
+            <a:pPr algn="l">
+              <a:lnSpc>
+                <a:spcPct val="115000"/>
+              </a:lnSpc>
+              <a:spcAft>
+                <a:spcPts val="0"/>
+              </a:spcAft>
+            </a:pPr>
+            <a:r>
+              <a:rPr sz="1000" b="0">
+                <a:solidFill>
+                  <a:srgbClr val="1E1E1E"/>
+                </a:solidFill>
+                <a:latin typeface="Golos Text Medium"/>
+              </a:rPr>
+              <a:t>Из чего состоит волна 1: 15 объектов</a:t>
+            </a:r>
+          </a:p>
+        </p:txBody>
+      </p:sp>
+      <p:sp>
+        <p:nvSpPr>
+          <p:cNvPr id="19" name="Rounded Rectangle 18"/>
+          <p:cNvSpPr/>
+          <p:nvPr/>
+        </p:nvSpPr>
+        <p:spPr>
+          <a:xfrm>
+            <a:off x="397125" y="3810000"/>
+            <a:ext cx="2689916" cy="810000"/>
+          </a:xfrm>
+          <a:prstGeom prst="roundRect">
+            <a:avLst>
+              <a:gd name="adj" fmla="val 6000"/>
+            </a:avLst>
+          </a:prstGeom>
+          <a:solidFill>
+            <a:srgbClr val="F3F3F3"/>
+          </a:solidFill>
+          <a:ln>
+            <a:noFill/>
+          </a:ln>
+          <a:effectLst/>
+        </p:spPr>
+        <p:style>
+          <a:lnRef idx="1">
+            <a:schemeClr val="accent1"/>
+          </a:lnRef>
+          <a:fillRef idx="3">
+            <a:schemeClr val="accent1"/>
+          </a:fillRef>
+          <a:effectRef idx="2">
+            <a:schemeClr val="accent1"/>
+          </a:effectRef>
+          <a:fontRef idx="minor">
+            <a:schemeClr val="lt1"/>
+          </a:fontRef>
+        </p:style>
+        <p:txBody>
+          <a:bodyPr rtlCol="0" anchor="t" lIns="110000" rIns="110000" tIns="80000" bIns="80000" wrap="square"/>
+          <a:lstStyle/>
+          <a:p>
+            <a:pPr algn="l">
+              <a:lnSpc>
+                <a:spcPct val="100000"/>
+              </a:lnSpc>
+            </a:pPr>
+            <a:r>
+              <a:rPr sz="1600">
+                <a:solidFill>
+                  <a:srgbClr val="E94235"/>
+                </a:solidFill>
+                <a:latin typeface="Golos Text SemiBold"/>
+              </a:rPr>
+              <a:t>6</a:t>
+            </a:r>
+            <a:r>
+              <a:rPr sz="1000">
+                <a:solidFill>
+                  <a:srgbClr val="E94235"/>
+                </a:solidFill>
+                <a:latin typeface="Golos Text SemiBold"/>
+              </a:rPr>
+              <a:t>   зон без владельца</a:t>
+            </a:r>
+          </a:p>
+          <a:p>
+            <a:pPr>
+              <a:lnSpc>
+                <a:spcPct val="120000"/>
+              </a:lnSpc>
+              <a:spcBef>
+                <a:spcPts val="500"/>
+              </a:spcBef>
+            </a:pPr>
+            <a:r>
+              <a:rPr sz="850">
+                <a:solidFill>
+                  <a:srgbClr val="282828"/>
+                </a:solidFill>
+                <a:latin typeface="Golos Text"/>
+              </a:rPr>
+              <a:t>Владелец не закреплён ни в должностных инструкциях, ни в кадровой матрице</a:t>
+            </a:r>
+          </a:p>
+        </p:txBody>
+      </p:sp>
+      <p:sp>
+        <p:nvSpPr>
+          <p:cNvPr id="20" name="Rounded Rectangle 19"/>
+          <p:cNvSpPr/>
+          <p:nvPr/>
+        </p:nvSpPr>
+        <p:spPr>
+          <a:xfrm>
+            <a:off x="3227041" y="3810000"/>
+            <a:ext cx="2689916" cy="810000"/>
+          </a:xfrm>
+          <a:prstGeom prst="roundRect">
+            <a:avLst>
+              <a:gd name="adj" fmla="val 6000"/>
+            </a:avLst>
+          </a:prstGeom>
+          <a:solidFill>
+            <a:srgbClr val="F3F3F3"/>
+          </a:solidFill>
+          <a:ln>
+            <a:noFill/>
+          </a:ln>
+          <a:effectLst/>
+        </p:spPr>
+        <p:style>
+          <a:lnRef idx="1">
+            <a:schemeClr val="accent1"/>
+          </a:lnRef>
+          <a:fillRef idx="3">
+            <a:schemeClr val="accent1"/>
+          </a:fillRef>
+          <a:effectRef idx="2">
+            <a:schemeClr val="accent1"/>
+          </a:effectRef>
+          <a:fontRef idx="minor">
+            <a:schemeClr val="lt1"/>
+          </a:fontRef>
+        </p:style>
+        <p:txBody>
+          <a:bodyPr rtlCol="0" anchor="t" lIns="110000" rIns="110000" tIns="80000" bIns="80000" wrap="square"/>
+          <a:lstStyle/>
+          <a:p>
+            <a:pPr algn="l">
+              <a:lnSpc>
+                <a:spcPct val="100000"/>
+              </a:lnSpc>
+            </a:pPr>
+            <a:r>
+              <a:rPr sz="1600">
+                <a:solidFill>
+                  <a:srgbClr val="013D85"/>
+                </a:solidFill>
+                <a:latin typeface="Golos Text SemiBold"/>
+              </a:rPr>
+              <a:t>5</a:t>
+            </a:r>
+            <a:r>
+              <a:rPr sz="1000">
+                <a:solidFill>
+                  <a:srgbClr val="013D85"/>
+                </a:solidFill>
+                <a:latin typeface="Golos Text SemiBold"/>
+              </a:rPr>
+              <a:t>   с размытым владением</a:t>
+            </a:r>
+          </a:p>
+          <a:p>
+            <a:pPr>
+              <a:lnSpc>
+                <a:spcPct val="120000"/>
+              </a:lnSpc>
+              <a:spcBef>
+                <a:spcPts val="500"/>
+              </a:spcBef>
+            </a:pPr>
+            <a:r>
+              <a:rPr sz="850">
+                <a:solidFill>
+                  <a:srgbClr val="282828"/>
+                </a:solidFill>
+                <a:latin typeface="Golos Text"/>
+              </a:rPr>
+              <a:t>Процесс принадлежит ДУП, но единственная роль A внутри ДУП не выделена</a:t>
+            </a:r>
+          </a:p>
+        </p:txBody>
+      </p:sp>
+      <p:sp>
+        <p:nvSpPr>
+          <p:cNvPr id="21" name="Rounded Rectangle 20"/>
+          <p:cNvSpPr/>
+          <p:nvPr/>
+        </p:nvSpPr>
+        <p:spPr>
+          <a:xfrm>
+            <a:off x="6056957" y="3810000"/>
+            <a:ext cx="2689916" cy="810000"/>
+          </a:xfrm>
+          <a:prstGeom prst="roundRect">
+            <a:avLst>
+              <a:gd name="adj" fmla="val 6000"/>
+            </a:avLst>
+          </a:prstGeom>
+          <a:solidFill>
+            <a:srgbClr val="F3F3F3"/>
+          </a:solidFill>
+          <a:ln>
+            <a:noFill/>
+          </a:ln>
+          <a:effectLst/>
+        </p:spPr>
+        <p:style>
+          <a:lnRef idx="1">
+            <a:schemeClr val="accent1"/>
+          </a:lnRef>
+          <a:fillRef idx="3">
+            <a:schemeClr val="accent1"/>
+          </a:fillRef>
+          <a:effectRef idx="2">
+            <a:schemeClr val="accent1"/>
+          </a:effectRef>
+          <a:fontRef idx="minor">
+            <a:schemeClr val="lt1"/>
+          </a:fontRef>
+        </p:style>
+        <p:txBody>
+          <a:bodyPr rtlCol="0" anchor="t" lIns="110000" rIns="110000" tIns="80000" bIns="80000" wrap="square"/>
+          <a:lstStyle/>
+          <a:p>
+            <a:pPr algn="l">
+              <a:lnSpc>
+                <a:spcPct val="100000"/>
+              </a:lnSpc>
+            </a:pPr>
+            <a:r>
+              <a:rPr sz="1600">
+                <a:solidFill>
+                  <a:srgbClr val="013D85"/>
+                </a:solidFill>
+                <a:latin typeface="Golos Text SemiBold"/>
+              </a:rPr>
+              <a:t>4</a:t>
+            </a:r>
+            <a:r>
+              <a:rPr sz="1000">
+                <a:solidFill>
+                  <a:srgbClr val="013D85"/>
+                </a:solidFill>
+                <a:latin typeface="Golos Text SemiBold"/>
+              </a:rPr>
+              <a:t>   замер и стык с ЦО</a:t>
+            </a:r>
+          </a:p>
+          <a:p>
+            <a:pPr>
+              <a:lnSpc>
+                <a:spcPct val="120000"/>
+              </a:lnSpc>
+              <a:spcBef>
+                <a:spcPts val="500"/>
+              </a:spcBef>
+            </a:pPr>
+            <a:r>
+              <a:rPr sz="850">
+                <a:solidFill>
+                  <a:srgbClr val="282828"/>
+                </a:solidFill>
+                <a:latin typeface="Golos Text"/>
+              </a:rPr>
+              <a:t>Пилотный аудит, контроль качества данных, матрица кураторов, срок приказов HR</a:t>
             </a:r>
           </a:p>
         </p:txBody>

--- a/dup_project/02_Презентация/ДУП_Приоритеты_реинжиниринга_презентация.pptx
+++ b/dup_project/02_Презентация/ДУП_Приоритеты_реинжиниринга_презентация.pptx
@@ -18593,7 +18593,7 @@
                 </a:solidFill>
                 <a:latin typeface="Golos Text"/>
               </a:rPr>
-              <a:t>Шаги 1–5 закрывают ответственность и снимают базовую линию</a:t>
+              <a:t>Шаги 1–5 доводят владение до приказа и снимают базовую линию</a:t>
             </a:r>
           </a:p>
         </p:txBody>
@@ -18823,7 +18823,7 @@
                 </a:solidFill>
                 <a:latin typeface="Golos Text"/>
               </a:rPr>
-              <a:t>Фаза 0  ·  4.2.1, 4.2</a:t>
+              <a:t>Фаза 0  ·  4.2.1</a:t>
             </a:r>
           </a:p>
         </p:txBody>
@@ -18971,7 +18971,7 @@
                 </a:solidFill>
                 <a:latin typeface="Golos Text SemiBold"/>
               </a:rPr>
-              <a:t>Приказ о владельцах зон без ответственного</a:t>
+              <a:t>Чек-лист передачи «реализация → сопровождение»</a:t>
             </a:r>
           </a:p>
         </p:txBody>
@@ -19013,7 +19013,7 @@
                 </a:solidFill>
                 <a:latin typeface="Golos Text"/>
               </a:rPr>
-              <a:t>Результат: Приказ и запись в матрице ролей</a:t>
+              <a:t>Результат: Чек-лист передачи и обязательная дата handover в карточке проекта</a:t>
             </a:r>
           </a:p>
         </p:txBody>
@@ -19055,7 +19055,7 @@
                 </a:solidFill>
                 <a:latin typeface="Golos Text Medium"/>
               </a:rPr>
-              <a:t>Директор ДУП</a:t>
+              <a:t>Зам. по строительству и реализации</a:t>
             </a:r>
           </a:p>
         </p:txBody>
@@ -19097,7 +19097,7 @@
                 </a:solidFill>
                 <a:latin typeface="Golos Text"/>
               </a:rPr>
-              <a:t>Фаза 1  ·  2.0, 2.7, 3.2, Б.5, Б.5.1, Б.5.3</a:t>
+              <a:t>Фаза 1  ·  2.0</a:t>
             </a:r>
           </a:p>
         </p:txBody>
@@ -19245,7 +19245,7 @@
                 </a:solidFill>
                 <a:latin typeface="Golos Text SemiBold"/>
               </a:rPr>
-              <a:t>Утверждение целевой оргсхемы и матрицы RACI v2</a:t>
+              <a:t>Приказ о разделении заместителей и матрица RACI v2</a:t>
             </a:r>
           </a:p>
         </p:txBody>
@@ -19287,7 +19287,7 @@
                 </a:solidFill>
                 <a:latin typeface="Golos Text"/>
               </a:rPr>
-              <a:t>Результат: Оргсхема и RACI v2, согласованная с ДРБ и Финблоком</a:t>
+              <a:t>Результат: Приказ, целевая оргсхема и RACI v2</a:t>
             </a:r>
           </a:p>
         </p:txBody>
@@ -19329,7 +19329,7 @@
                 </a:solidFill>
                 <a:latin typeface="Golos Text Medium"/>
               </a:rPr>
-              <a:t>Директор ДУП, главный менеджер проектов</a:t>
+              <a:t>Директор ДУП</a:t>
             </a:r>
           </a:p>
         </p:txBody>
@@ -19371,7 +19371,7 @@
                 </a:solidFill>
                 <a:latin typeface="Golos Text"/>
               </a:rPr>
-              <a:t>Фаза 1  ·  1, 2, 3, 3.3, 4</a:t>
+              <a:t>Фаза 1  ·  1, 2, 2.0</a:t>
             </a:r>
           </a:p>
         </p:txBody>
@@ -19519,7 +19519,7 @@
                 </a:solidFill>
                 <a:latin typeface="Golos Text SemiBold"/>
               </a:rPr>
-              <a:t>Назначение главного менеджера проектов с полномочиями процессного офиса</a:t>
+              <a:t>Приказ о полномочиях процессного офиса</a:t>
             </a:r>
           </a:p>
         </p:txBody>
@@ -19561,7 +19561,7 @@
                 </a:solidFill>
                 <a:latin typeface="Golos Text"/>
               </a:rPr>
-              <a:t>Результат: Приказ о назначении и должностная инструкция</a:t>
+              <a:t>Результат: Приказ о полномочиях ПМО и должностная инструкция</a:t>
             </a:r>
           </a:p>
         </p:txBody>
@@ -19645,7 +19645,7 @@
                 </a:solidFill>
                 <a:latin typeface="Golos Text"/>
               </a:rPr>
-              <a:t>Фаза 1  ·  4, 4.1</a:t>
+              <a:t>Фаза 1  ·  4, 4.1, 4.2</a:t>
             </a:r>
           </a:p>
         </p:txBody>
@@ -19793,7 +19793,7 @@
                 </a:solidFill>
                 <a:latin typeface="Golos Text SemiBold"/>
               </a:rPr>
-              <a:t>Утверждение матрицы «филиал → куратор»</a:t>
+              <a:t>Норматив срока оформления кадровых приказов с HR</a:t>
             </a:r>
           </a:p>
         </p:txBody>
@@ -19835,7 +19835,7 @@
                 </a:solidFill>
                 <a:latin typeface="Golos Text"/>
               </a:rPr>
-              <a:t>Результат: Утверждённая приказом матрица</a:t>
+              <a:t>Результат: Соглашение с HR о сроке оформления приказов по филиалу и проекту</a:t>
             </a:r>
           </a:p>
         </p:txBody>
@@ -19919,7 +19919,7 @@
                 </a:solidFill>
                 <a:latin typeface="Golos Text"/>
               </a:rPr>
-              <a:t>Фаза 1  ·  3.1, 1.3</a:t>
+              <a:t>Фаза 1  ·  Б.9</a:t>
             </a:r>
           </a:p>
         </p:txBody>
@@ -19961,7 +19961,7 @@
                 </a:solidFill>
                 <a:latin typeface="Golos Text"/>
               </a:rPr>
-              <a:t>Шаги 6–10 — восстановление исполнения внутри ДУП: приёмка пакета от ДРБ, платежи, статус-встречи, прогноз, переносы оборудования.</a:t>
+              <a:t>Шаги 6–11 — восстановление исполнения внутри ДУП: матрица кураторов, приёмка пакета от ДРБ, платежи, статус-встречи, прогноз, переносы оборудования.</a:t>
             </a:r>
           </a:p>
         </p:txBody>
@@ -20167,7 +20167,7 @@
                 </a:solidFill>
                 <a:latin typeface="Golos Text SemiBold"/>
               </a:rPr>
-              <a:t>Приказ о владельцах зон без ответственного</a:t>
+              <a:t>Приказ о разделении заместителей и матрица RACI v2</a:t>
             </a:r>
           </a:p>
         </p:txBody>
@@ -20209,7 +20209,7 @@
                 </a:solidFill>
                 <a:latin typeface="Golos Text"/>
               </a:rPr>
-              <a:t>Закрывается документом: Приказ и запись в матрице ролей</a:t>
+              <a:t>Закрывается документом: Приказ, целевая оргсхема и RACI v2</a:t>
             </a:r>
           </a:p>
         </p:txBody>
@@ -20357,7 +20357,7 @@
                 </a:solidFill>
                 <a:latin typeface="Golos Text SemiBold"/>
               </a:rPr>
-              <a:t>Утверждение целевой оргсхемы и матрицы RACI v2</a:t>
+              <a:t>Приказ о полномочиях процессного офиса</a:t>
             </a:r>
           </a:p>
         </p:txBody>
@@ -20399,7 +20399,7 @@
                 </a:solidFill>
                 <a:latin typeface="Golos Text"/>
               </a:rPr>
-              <a:t>Закрывается документом: Оргсхема и RACI v2, согласованная с ДРБ и Финблоком</a:t>
+              <a:t>Закрывается документом: Приказ о полномочиях ПМО и должностная инструкция</a:t>
             </a:r>
           </a:p>
         </p:txBody>
@@ -20547,7 +20547,7 @@
                 </a:solidFill>
                 <a:latin typeface="Golos Text SemiBold"/>
               </a:rPr>
-              <a:t>Назначение главного менеджера проектов с полномочиями процессного офиса</a:t>
+              <a:t>Норматив срока оформления кадровых приказов с HR</a:t>
             </a:r>
           </a:p>
         </p:txBody>
@@ -20589,7 +20589,7 @@
                 </a:solidFill>
                 <a:latin typeface="Golos Text"/>
               </a:rPr>
-              <a:t>Закрывается документом: Приказ о назначении и должностная инструкция</a:t>
+              <a:t>Закрывается документом: Соглашение с HR о сроке оформления приказов по филиалу и проекту</a:t>
             </a:r>
           </a:p>
         </p:txBody>
@@ -21172,7 +21172,7 @@
                 </a:solidFill>
                 <a:latin typeface="Golos Text SemiBold"/>
               </a:rPr>
-              <a:t>Пока у процесса нет владельца и замера «до», выгоду от его оптимизации нечем доказать.</a:t>
+              <a:t>Владелец закреплён у каждого объекта. Пока решение не доведено до приказа и не снят замер «до», выгоду от оптимизации нечем доказать.</a:t>
             </a:r>
           </a:p>
         </p:txBody>
@@ -21390,7 +21390,7 @@
                 </a:solidFill>
                 <a:latin typeface="Golos Text SemiBold"/>
               </a:rPr>
-              <a:t>6</a:t>
+              <a:t>3</a:t>
             </a:r>
           </a:p>
         </p:txBody>
@@ -21432,7 +21432,7 @@
                 </a:solidFill>
                 <a:latin typeface="Golos Text"/>
               </a:rPr>
-              <a:t>зон без владельца — они блокируют старт</a:t>
+              <a:t>решения о владении ждут приказа — они держат очередь</a:t>
             </a:r>
           </a:p>
         </p:txBody>
@@ -21520,7 +21520,7 @@
                 </a:solidFill>
                 <a:latin typeface="Golos Text SemiBold"/>
               </a:rPr>
-              <a:t>11</a:t>
+              <a:t>10</a:t>
             </a:r>
           </a:p>
         </p:txBody>
@@ -21650,7 +21650,7 @@
                 </a:solidFill>
                 <a:latin typeface="Golos Text SemiBold"/>
               </a:rPr>
-              <a:t>10</a:t>
+              <a:t>11</a:t>
             </a:r>
           </a:p>
         </p:txBody>
@@ -23227,7 +23227,7 @@
                 </a:solidFill>
                 <a:latin typeface="Golos Text SemiBold"/>
               </a:rPr>
-              <a:t>Владелец раньше метрик</a:t>
+              <a:t>Владение раньше метрик</a:t>
             </a:r>
           </a:p>
         </p:txBody>
@@ -23269,7 +23269,7 @@
                 </a:solidFill>
                 <a:latin typeface="Golos Text"/>
               </a:rPr>
-              <a:t>Пока роль A не закреплена, спрашивать за результат не с кого — п. 33</a:t>
+              <a:t>Спрашивать за результат можно только с той должности, которая есть — п. 33</a:t>
             </a:r>
           </a:p>
         </p:txBody>
@@ -24255,7 +24255,7 @@
                 </a:solidFill>
                 <a:latin typeface="Golos Text SemiBold"/>
               </a:rPr>
-              <a:t>Владение и базовая линия</a:t>
+              <a:t>Закрепление владения и базовая линия</a:t>
             </a:r>
           </a:p>
           <a:p>
@@ -24274,7 +24274,7 @@
                 </a:solidFill>
                 <a:latin typeface="Golos Text"/>
               </a:rPr>
-              <a:t>Закрыть вопрос «кто отвечает» и снять базовую линию</a:t>
+              <a:t>Довести решения о владении до приказа и снять базовую линию</a:t>
             </a:r>
           </a:p>
         </p:txBody>
@@ -24338,7 +24338,7 @@
                 </a:solidFill>
                 <a:latin typeface="Golos Text Medium"/>
               </a:rPr>
-              <a:t>15 объектов  ·  Фазы 0–1</a:t>
+              <a:t>7 объектов  ·  Фазы 0–1</a:t>
             </a:r>
           </a:p>
         </p:txBody>
@@ -24545,7 +24545,7 @@
                 </a:solidFill>
                 <a:latin typeface="Golos Text Medium"/>
               </a:rPr>
-              <a:t>14 объектов  ·  Фаза 2</a:t>
+              <a:t>20 объектов  ·  Фаза 2</a:t>
             </a:r>
           </a:p>
         </p:txBody>
@@ -24752,7 +24752,7 @@
                 </a:solidFill>
                 <a:latin typeface="Golos Text Medium"/>
               </a:rPr>
-              <a:t>21 объектов  ·  Фаза 3</a:t>
+              <a:t>23 объектов  ·  Фаза 3</a:t>
             </a:r>
           </a:p>
         </p:txBody>
@@ -25087,7 +25087,7 @@
                 </a:solidFill>
                 <a:latin typeface="Golos Text Medium"/>
               </a:rPr>
-              <a:t>Из чего состоит волна 1: 15 объектов</a:t>
+              <a:t>Из чего состоит волна 1: 7 объектов</a:t>
             </a:r>
           </a:p>
         </p:txBody>
@@ -25146,7 +25146,7 @@
                 </a:solidFill>
                 <a:latin typeface="Golos Text SemiBold"/>
               </a:rPr>
-              <a:t>6</a:t>
+              <a:t>4</a:t>
             </a:r>
             <a:r>
               <a:rPr sz="1000">
@@ -25155,7 +25155,7 @@
                 </a:solidFill>
                 <a:latin typeface="Golos Text SemiBold"/>
               </a:rPr>
-              <a:t>   зон без владельца</a:t>
+              <a:t>   доводим владение до приказа</a:t>
             </a:r>
           </a:p>
           <a:p>
@@ -25174,7 +25174,7 @@
                 </a:solidFill>
                 <a:latin typeface="Golos Text"/>
               </a:rPr>
-              <a:t>Владелец не закреплён ни в должностных инструкциях, ни в кадровой матрице</a:t>
+              <a:t>Чек-лист передачи между блоками 1 и 2, разделение заместителей, полномочия ПМО</a:t>
             </a:r>
           </a:p>
         </p:txBody>
@@ -25233,7 +25233,7 @@
                 </a:solidFill>
                 <a:latin typeface="Golos Text SemiBold"/>
               </a:rPr>
-              <a:t>5</a:t>
+              <a:t>2</a:t>
             </a:r>
             <a:r>
               <a:rPr sz="1000">
@@ -25242,7 +25242,7 @@
                 </a:solidFill>
                 <a:latin typeface="Golos Text SemiBold"/>
               </a:rPr>
-              <a:t>   с размытым владением</a:t>
+              <a:t>   снимаем базовую линию</a:t>
             </a:r>
           </a:p>
           <a:p>
@@ -25261,7 +25261,7 @@
                 </a:solidFill>
                 <a:latin typeface="Golos Text"/>
               </a:rPr>
-              <a:t>Процесс принадлежит ДУП, но единственная роль A внутри ДУП не выделена</a:t>
+              <a:t>Пилотный аудит одного филиала и регулярный контроль качества данных</a:t>
             </a:r>
           </a:p>
         </p:txBody>
@@ -25320,7 +25320,7 @@
                 </a:solidFill>
                 <a:latin typeface="Golos Text SemiBold"/>
               </a:rPr>
-              <a:t>4</a:t>
+              <a:t>1</a:t>
             </a:r>
             <a:r>
               <a:rPr sz="1000">
@@ -25329,7 +25329,7 @@
                 </a:solidFill>
                 <a:latin typeface="Golos Text SemiBold"/>
               </a:rPr>
-              <a:t>   замер и стык с ЦО</a:t>
+              <a:t>   нормируем срок стыка с ЦО</a:t>
             </a:r>
           </a:p>
           <a:p>
@@ -25348,7 +25348,7 @@
                 </a:solidFill>
                 <a:latin typeface="Golos Text"/>
               </a:rPr>
-              <a:t>Пилотный аудит, контроль качества данных, матрица кураторов, срок приказов HR</a:t>
+              <a:t>Решения волны вступают в силу в день приказа HR — нужен норматив срока</a:t>
             </a:r>
           </a:p>
         </p:txBody>
@@ -25674,7 +25674,7 @@
                 </a:solidFill>
                 <a:latin typeface="Golos Text SemiBold"/>
               </a:rPr>
-              <a:t>11</a:t>
+              <a:t>10</a:t>
             </a:r>
             <a:r>
               <a:rPr sz="1150">
@@ -25761,7 +25761,7 @@
                 </a:solidFill>
                 <a:latin typeface="Golos Text SemiBold"/>
               </a:rPr>
-              <a:t>24</a:t>
+              <a:t>21</a:t>
             </a:r>
             <a:r>
               <a:rPr sz="1150">
@@ -25929,7 +25929,7 @@
                 </a:solidFill>
                 <a:latin typeface="Golos Text SemiBold"/>
               </a:rPr>
-              <a:t>12</a:t>
+              <a:t>15</a:t>
             </a:r>
             <a:r>
               <a:rPr sz="1150">
@@ -26016,7 +26016,7 @@
                 </a:solidFill>
                 <a:latin typeface="Golos Text SemiBold"/>
               </a:rPr>
-              <a:t>14</a:t>
+              <a:t>15</a:t>
             </a:r>
             <a:r>
               <a:rPr sz="1150">
@@ -26146,7 +26146,7 @@
                 </a:solidFill>
                 <a:latin typeface="Golos Text"/>
               </a:rPr>
-              <a:t>Волна 1 целиком — вопрос ответственности и базовая линия</a:t>
+              <a:t>Волна 1 целиком — закрепление владения и базовая линия</a:t>
             </a:r>
           </a:p>
         </p:txBody>
@@ -26566,7 +26566,7 @@
                 </a:solidFill>
                 <a:latin typeface="Golos Text"/>
               </a:rPr>
-              <a:t>2.7</a:t>
+              <a:t>2.0</a:t>
             </a:r>
           </a:p>
         </p:txBody>
@@ -26626,7 +26626,7 @@
                 </a:solidFill>
                 <a:latin typeface="Golos Text"/>
               </a:rPr>
-              <a:t>Обратная связь по дефектам компонентов → владелец…</a:t>
+              <a:t>Передача проекта «реализация → сопровождение»</a:t>
             </a:r>
           </a:p>
         </p:txBody>
@@ -26686,7 +26686,7 @@
                 </a:solidFill>
                 <a:latin typeface="Golos Text"/>
               </a:rPr>
-              <a:t>75</a:t>
+              <a:t>64</a:t>
             </a:r>
           </a:p>
         </p:txBody>
@@ -26746,7 +26746,7 @@
                 </a:solidFill>
                 <a:latin typeface="Golos Text"/>
               </a:rPr>
-              <a:t>Назначение владельца</a:t>
+              <a:t>Проектирование TO-BE</a:t>
             </a:r>
           </a:p>
         </p:txBody>
@@ -26866,7 +26866,7 @@
                 </a:solidFill>
                 <a:latin typeface="Golos Text"/>
               </a:rPr>
-              <a:t>2.0</a:t>
+              <a:t>1</a:t>
             </a:r>
           </a:p>
         </p:txBody>
@@ -26926,7 +26926,7 @@
                 </a:solidFill>
                 <a:latin typeface="Golos Text"/>
               </a:rPr>
-              <a:t>Передача проекта «реализация → сопровождение»</a:t>
+              <a:t>Реализация проекта</a:t>
             </a:r>
           </a:p>
         </p:txBody>
@@ -26986,7 +26986,7 @@
                 </a:solidFill>
                 <a:latin typeface="Golos Text"/>
               </a:rPr>
-              <a:t>67</a:t>
+              <a:t>66</a:t>
             </a:r>
           </a:p>
         </p:txBody>
@@ -27046,7 +27046,7 @@
                 </a:solidFill>
                 <a:latin typeface="Golos Text"/>
               </a:rPr>
-              <a:t>Назначение владельца</a:t>
+              <a:t>Закрепление владения приказом</a:t>
             </a:r>
           </a:p>
         </p:txBody>
@@ -27166,7 +27166,7 @@
                 </a:solidFill>
                 <a:latin typeface="Golos Text"/>
               </a:rPr>
-              <a:t>1</a:t>
+              <a:t>2</a:t>
             </a:r>
           </a:p>
         </p:txBody>
@@ -27226,7 +27226,7 @@
                 </a:solidFill>
                 <a:latin typeface="Golos Text"/>
               </a:rPr>
-              <a:t>Реализация проекта</a:t>
+              <a:t>Постпроектное сопровождение</a:t>
             </a:r>
           </a:p>
         </p:txBody>
@@ -27286,7 +27286,7 @@
                 </a:solidFill>
                 <a:latin typeface="Golos Text"/>
               </a:rPr>
-              <a:t>66</a:t>
+              <a:t>62</a:t>
             </a:r>
           </a:p>
         </p:txBody>
@@ -27346,7 +27346,7 @@
                 </a:solidFill>
                 <a:latin typeface="Golos Text"/>
               </a:rPr>
-              <a:t>Назначение владельца</a:t>
+              <a:t>Закрепление владения приказом</a:t>
             </a:r>
           </a:p>
         </p:txBody>
@@ -27466,7 +27466,7 @@
                 </a:solidFill>
                 <a:latin typeface="Golos Text"/>
               </a:rPr>
-              <a:t>2</a:t>
+              <a:t>4</a:t>
             </a:r>
           </a:p>
         </p:txBody>
@@ -27526,7 +27526,7 @@
                 </a:solidFill>
                 <a:latin typeface="Golos Text"/>
               </a:rPr>
-              <a:t>Постпроектное сопровождение</a:t>
+              <a:t>Методология и контроль качества (ПМО)</a:t>
             </a:r>
           </a:p>
         </p:txBody>
@@ -27586,7 +27586,7 @@
                 </a:solidFill>
                 <a:latin typeface="Golos Text"/>
               </a:rPr>
-              <a:t>62</a:t>
+              <a:t>61</a:t>
             </a:r>
           </a:p>
         </p:txBody>
@@ -27646,7 +27646,7 @@
                 </a:solidFill>
                 <a:latin typeface="Golos Text"/>
               </a:rPr>
-              <a:t>Назначение владельца</a:t>
+              <a:t>Закрепление владения приказом</a:t>
             </a:r>
           </a:p>
         </p:txBody>
@@ -27766,7 +27766,7 @@
                 </a:solidFill>
                 <a:latin typeface="Golos Text"/>
               </a:rPr>
-              <a:t>Б.5.1</a:t>
+              <a:t>4.2.1</a:t>
             </a:r>
           </a:p>
         </p:txBody>
@@ -27826,7 +27826,7 @@
                 </a:solidFill>
                 <a:latin typeface="Golos Text"/>
               </a:rPr>
-              <a:t>Инициирование, участие в сборе данных</a:t>
+              <a:t>Аудит проектной документации по чек-листам</a:t>
             </a:r>
           </a:p>
         </p:txBody>
@@ -27886,7 +27886,7 @@
                 </a:solidFill>
                 <a:latin typeface="Golos Text"/>
               </a:rPr>
-              <a:t>62</a:t>
+              <a:t>57</a:t>
             </a:r>
           </a:p>
         </p:txBody>
@@ -27946,7 +27946,7 @@
                 </a:solidFill>
                 <a:latin typeface="Golos Text"/>
               </a:rPr>
-              <a:t>Назначение владельца</a:t>
+              <a:t>Базовая линия и замер</a:t>
             </a:r>
           </a:p>
         </p:txBody>
@@ -28066,7 +28066,7 @@
                 </a:solidFill>
                 <a:latin typeface="Golos Text"/>
               </a:rPr>
-              <a:t>4</a:t>
+              <a:t>Б.9</a:t>
             </a:r>
           </a:p>
         </p:txBody>
@@ -28126,7 +28126,7 @@
                 </a:solidFill>
                 <a:latin typeface="Golos Text"/>
               </a:rPr>
-              <a:t>Методология и контроль качества (ПМО)</a:t>
+              <a:t>Оформление штата и кадровых приказов по проекту и…</a:t>
             </a:r>
           </a:p>
         </p:txBody>
@@ -28186,7 +28186,7 @@
                 </a:solidFill>
                 <a:latin typeface="Golos Text"/>
               </a:rPr>
-              <a:t>61</a:t>
+              <a:t>55</a:t>
             </a:r>
           </a:p>
         </p:txBody>
@@ -28246,7 +28246,7 @@
                 </a:solidFill>
                 <a:latin typeface="Golos Text"/>
               </a:rPr>
-              <a:t>Назначение владельца</a:t>
+              <a:t>SLA на стык с ЦО</a:t>
             </a:r>
           </a:p>
         </p:txBody>
@@ -28366,7 +28366,7 @@
                 </a:solidFill>
                 <a:latin typeface="Golos Text"/>
               </a:rPr>
-              <a:t>3.2</a:t>
+              <a:t>4.2</a:t>
             </a:r>
           </a:p>
         </p:txBody>
@@ -28426,7 +28426,7 @@
                 </a:solidFill>
                 <a:latin typeface="Golos Text"/>
               </a:rPr>
-              <a:t>Открытие нового филиала</a:t>
+              <a:t>Контроль качества и полноты проектных данных</a:t>
             </a:r>
           </a:p>
         </p:txBody>
@@ -28486,7 +28486,7 @@
                 </a:solidFill>
                 <a:latin typeface="Golos Text"/>
               </a:rPr>
-              <a:t>59</a:t>
+              <a:t>54</a:t>
             </a:r>
           </a:p>
         </p:txBody>
@@ -28546,7 +28546,7 @@
                 </a:solidFill>
                 <a:latin typeface="Golos Text"/>
               </a:rPr>
-              <a:t>Назначение владельца</a:t>
+              <a:t>Базовая линия и замер</a:t>
             </a:r>
           </a:p>
         </p:txBody>
@@ -28666,7 +28666,7 @@
                 </a:solidFill>
                 <a:latin typeface="Golos Text"/>
               </a:rPr>
-              <a:t>Б.5</a:t>
+              <a:t>1.1</a:t>
             </a:r>
           </a:p>
         </p:txBody>
@@ -28726,7 +28726,7 @@
                 </a:solidFill>
                 <a:latin typeface="Golos Text"/>
               </a:rPr>
-              <a:t>Открытие нового филиала</a:t>
+              <a:t>Приём и валидация пакета документов от ДРБ</a:t>
             </a:r>
           </a:p>
         </p:txBody>
@@ -28786,7 +28786,7 @@
                 </a:solidFill>
                 <a:latin typeface="Golos Text"/>
               </a:rPr>
-              <a:t>59</a:t>
+              <a:t>86</a:t>
             </a:r>
           </a:p>
         </p:txBody>
@@ -28846,7 +28846,7 @@
                 </a:solidFill>
                 <a:latin typeface="Golos Text"/>
               </a:rPr>
-              <a:t>Назначение владельца</a:t>
+              <a:t>Регламент и чек-лист</a:t>
             </a:r>
           </a:p>
         </p:txBody>
@@ -28966,7 +28966,7 @@
                 </a:solidFill>
                 <a:latin typeface="Golos Text"/>
               </a:rPr>
-              <a:t>3</a:t>
+              <a:t>1.1.2</a:t>
             </a:r>
           </a:p>
         </p:txBody>
@@ -29026,7 +29026,7 @@
                 </a:solidFill>
                 <a:latin typeface="Golos Text"/>
               </a:rPr>
-              <a:t>Управление филиальной сетью</a:t>
+              <a:t>Проверка полноты пакета (договор, ФЭМ, ТЗ, адресная…</a:t>
             </a:r>
           </a:p>
         </p:txBody>
@@ -29086,7 +29086,7 @@
                 </a:solidFill>
                 <a:latin typeface="Golos Text"/>
               </a:rPr>
-              <a:t>58</a:t>
+              <a:t>85</a:t>
             </a:r>
           </a:p>
         </p:txBody>
@@ -29146,7 +29146,7 @@
                 </a:solidFill>
                 <a:latin typeface="Golos Text"/>
               </a:rPr>
-              <a:t>Назначение владельца</a:t>
+              <a:t>Регламент и чек-лист</a:t>
             </a:r>
           </a:p>
         </p:txBody>
@@ -29266,7 +29266,7 @@
                 </a:solidFill>
                 <a:latin typeface="Golos Text"/>
               </a:rPr>
-              <a:t>4.2.1</a:t>
+              <a:t>1.9</a:t>
             </a:r>
           </a:p>
         </p:txBody>
@@ -29326,7 +29326,7 @@
                 </a:solidFill>
                 <a:latin typeface="Golos Text"/>
               </a:rPr>
-              <a:t>Аудит проектной документации по чек-листам</a:t>
+              <a:t>Формирование реестра платежей и приоритизация</a:t>
             </a:r>
           </a:p>
         </p:txBody>
@@ -29386,7 +29386,7 @@
                 </a:solidFill>
                 <a:latin typeface="Golos Text"/>
               </a:rPr>
-              <a:t>57</a:t>
+              <a:t>83</a:t>
             </a:r>
           </a:p>
         </p:txBody>
@@ -29446,7 +29446,7 @@
                 </a:solidFill>
                 <a:latin typeface="Golos Text"/>
               </a:rPr>
-              <a:t>Базовая линия и замер</a:t>
+              <a:t>Регламент и чек-лист</a:t>
             </a:r>
           </a:p>
         </p:txBody>
@@ -31309,7 +31309,7 @@
                 </a:solidFill>
                 <a:latin typeface="Golos Text SemiBold"/>
               </a:rPr>
-              <a:t>Они ждут волн 2 и 3: сначала владельцы и замер, иначе эффект будет не доказан, а объявлен.</a:t>
+              <a:t>Они ждут волн 2 и 3: сначала приказы и замер, иначе эффект будет не доказан, а объявлен.</a:t>
             </a:r>
           </a:p>
         </p:txBody>

--- a/dup_project/02_Презентация/ДУП_Приоритеты_реинжиниринга_презентация.pptx
+++ b/dup_project/02_Презентация/ДУП_Приоритеты_реинжиниринга_презентация.pptx
@@ -21390,7 +21390,7 @@
                 </a:solidFill>
                 <a:latin typeface="Golos Text SemiBold"/>
               </a:rPr>
-              <a:t>3</a:t>
+              <a:t>5</a:t>
             </a:r>
           </a:p>
         </p:txBody>
@@ -21432,7 +21432,7 @@
                 </a:solidFill>
                 <a:latin typeface="Golos Text"/>
               </a:rPr>
-              <a:t>решения о владении ждут приказа — они держат очередь</a:t>
+              <a:t>решений о владении ждут документа — они держат очередь</a:t>
             </a:r>
           </a:p>
         </p:txBody>

--- a/dup_project/02_Презентация/ДУП_Приоритеты_реинжиниринга_презентация.pptx
+++ b/dup_project/02_Презентация/ДУП_Приоритеты_реинжиниринга_презентация.pptx
@@ -19038,7 +19038,7 @@
                 </a:solidFill>
                 <a:latin typeface="Golos Text SemiBold"/>
               </a:rPr>
-              <a:t>Закрепить организацию</a:t>
+              <a:t>Описать процессы, которыми владеем</a:t>
             </a:r>
           </a:p>
         </p:txBody>
@@ -19080,7 +19080,7 @@
                 </a:solidFill>
                 <a:latin typeface="Golos Text"/>
               </a:rPr>
-              <a:t>Разделение заместителей, полномочия процессного офиса, RACI v2 и паспорта процессов</a:t>
+              <a:t>Паспорта блоков 1, 2 и 4, чек-лист передачи и положение о контроле качества данных</a:t>
             </a:r>
           </a:p>
         </p:txBody>
@@ -20692,7 +20692,7 @@
                 </a:solidFill>
                 <a:latin typeface="Golos Text SemiBold"/>
               </a:rPr>
-              <a:t>Первыми берём не самые выгодные процессы, а те, что разблокируют остальные.</a:t>
+              <a:t>Первыми берём не самые выгодные процессы, а те, что задают точку отсчёта.</a:t>
             </a:r>
           </a:p>
           <a:p>
@@ -20711,7 +20711,7 @@
                 </a:solidFill>
                 <a:latin typeface="Golos Text SemiBold"/>
               </a:rPr>
-              <a:t>Владелец закреплён у каждого объекта. Пока решение не доведено до приказа и не снят замер «до», выгоду от оптимизации нечем доказать.</a:t>
+              <a:t>Владение закреплено у каждого объекта. Пока нет паспорта процесса и замера «до», выгоду от оптимизации нечем доказать.</a:t>
             </a:r>
           </a:p>
         </p:txBody>
@@ -20925,11 +20925,11 @@
             <a:r>
               <a:rPr sz="4400" b="0">
                 <a:solidFill>
-                  <a:srgbClr val="E94235"/>
+                  <a:srgbClr val="013D85"/>
                 </a:solidFill>
                 <a:latin typeface="Golos Text SemiBold"/>
               </a:rPr>
-              <a:t>5</a:t>
+              <a:t>6</a:t>
             </a:r>
           </a:p>
         </p:txBody>
@@ -20971,7 +20971,7 @@
                 </a:solidFill>
                 <a:latin typeface="Golos Text"/>
               </a:rPr>
-              <a:t>решений о владении ждут документа — они держат очередь</a:t>
+              <a:t>объектов волны 1 задают точку отсчёта: паспорт и замер</a:t>
             </a:r>
           </a:p>
         </p:txBody>
@@ -21059,7 +21059,7 @@
                 </a:solidFill>
                 <a:latin typeface="Golos Text SemiBold"/>
               </a:rPr>
-              <a:t>10</a:t>
+              <a:t>13</a:t>
             </a:r>
           </a:p>
         </p:txBody>
@@ -21543,7 +21543,7 @@
                 </a:solidFill>
                 <a:latin typeface="Golos Text SemiBold"/>
               </a:rPr>
-              <a:t>Закрепление владения и базовая линия</a:t>
+              <a:t>Паспорта и базовая линия</a:t>
             </a:r>
           </a:p>
           <a:p>
@@ -21562,7 +21562,7 @@
                 </a:solidFill>
                 <a:latin typeface="Golos Text"/>
               </a:rPr>
-              <a:t>Довести решения о владении до приказа и снять базовую линию</a:t>
+              <a:t>Паспорта сквозных процессов и замер «до»</a:t>
             </a:r>
           </a:p>
         </p:txBody>
@@ -21626,7 +21626,7 @@
                 </a:solidFill>
                 <a:latin typeface="Golos Text Medium"/>
               </a:rPr>
-              <a:t>7 объектов  ·  Фазы 0–1</a:t>
+              <a:t>6 объектов  ·  Фазы 0–1</a:t>
             </a:r>
           </a:p>
         </p:txBody>
@@ -22040,7 +22040,7 @@
                 </a:solidFill>
                 <a:latin typeface="Golos Text Medium"/>
               </a:rPr>
-              <a:t>23 объекта  ·  Фаза 3</a:t>
+              <a:t>24 объекта  ·  Фаза 3</a:t>
             </a:r>
           </a:p>
         </p:txBody>
@@ -22375,7 +22375,7 @@
                 </a:solidFill>
                 <a:latin typeface="Golos Text Medium"/>
               </a:rPr>
-              <a:t>Из чего состоит волна 1: 7 объектов</a:t>
+              <a:t>Из чего состоит волна 1: 6 объектов</a:t>
             </a:r>
           </a:p>
         </p:txBody>
@@ -22430,20 +22430,20 @@
             <a:r>
               <a:rPr sz="1600">
                 <a:solidFill>
-                  <a:srgbClr val="E94235"/>
+                  <a:srgbClr val="013D85"/>
                 </a:solidFill>
                 <a:latin typeface="Golos Text SemiBold"/>
               </a:rPr>
-              <a:t>4</a:t>
+              <a:t>3</a:t>
             </a:r>
             <a:r>
               <a:rPr sz="1000">
                 <a:solidFill>
-                  <a:srgbClr val="E94235"/>
+                  <a:srgbClr val="013D85"/>
                 </a:solidFill>
                 <a:latin typeface="Golos Text SemiBold"/>
               </a:rPr>
-              <a:t>   доводим владение до приказа</a:t>
+              <a:t>   описываем сквозные процессы</a:t>
             </a:r>
           </a:p>
           <a:p>
@@ -22462,7 +22462,7 @@
                 </a:solidFill>
                 <a:latin typeface="Golos Text"/>
               </a:rPr>
-              <a:t>Чек-лист передачи между блоками 1 и 2, разделение заместителей, полномочия ПМО</a:t>
+              <a:t>Паспорта блоков 1, 2 и 4: границы, вход, выход и показатели</a:t>
             </a:r>
           </a:p>
         </p:txBody>
@@ -22521,7 +22521,7 @@
                 </a:solidFill>
                 <a:latin typeface="Golos Text SemiBold"/>
               </a:rPr>
-              <a:t>2</a:t>
+              <a:t>1</a:t>
             </a:r>
             <a:r>
               <a:rPr sz="1000">
@@ -22530,7 +22530,7 @@
                 </a:solidFill>
                 <a:latin typeface="Golos Text SemiBold"/>
               </a:rPr>
-              <a:t>   снимаем базовую линию</a:t>
+              <a:t>   фиксируем границу между блоками</a:t>
             </a:r>
           </a:p>
           <a:p>
@@ -22549,7 +22549,7 @@
                 </a:solidFill>
                 <a:latin typeface="Golos Text"/>
               </a:rPr>
-              <a:t>Пилотный аудит одного филиала и регулярный контроль качества данных</a:t>
+              <a:t>Чек-лист передачи: общий выход реализации и вход сопровождения</a:t>
             </a:r>
           </a:p>
         </p:txBody>
@@ -22608,7 +22608,7 @@
                 </a:solidFill>
                 <a:latin typeface="Golos Text SemiBold"/>
               </a:rPr>
-              <a:t>1</a:t>
+              <a:t>2</a:t>
             </a:r>
             <a:r>
               <a:rPr sz="1000">
@@ -22617,7 +22617,7 @@
                 </a:solidFill>
                 <a:latin typeface="Golos Text SemiBold"/>
               </a:rPr>
-              <a:t>   нормируем срок стыка с ЦО</a:t>
+              <a:t>   снимаем базовую линию</a:t>
             </a:r>
           </a:p>
           <a:p>
@@ -22636,7 +22636,7 @@
                 </a:solidFill>
                 <a:latin typeface="Golos Text"/>
               </a:rPr>
-              <a:t>Решения волны вступают в силу в день приказа HR — нужен норматив срока</a:t>
+              <a:t>Пилотный аудит одного филиала и регулярный контроль качества данных</a:t>
             </a:r>
           </a:p>
         </p:txBody>
@@ -22962,7 +22962,7 @@
                 </a:solidFill>
                 <a:latin typeface="Golos Text SemiBold"/>
               </a:rPr>
-              <a:t>10</a:t>
+              <a:t>13</a:t>
             </a:r>
             <a:r>
               <a:rPr sz="1150">
@@ -23049,7 +23049,7 @@
                 </a:solidFill>
                 <a:latin typeface="Golos Text SemiBold"/>
               </a:rPr>
-              <a:t>21</a:t>
+              <a:t>18</a:t>
             </a:r>
             <a:r>
               <a:rPr sz="1150">
@@ -23434,7 +23434,7 @@
                 </a:solidFill>
                 <a:latin typeface="Golos Text"/>
               </a:rPr>
-              <a:t>Волна 1 целиком — закрепление владения и базовая линия</a:t>
+              <a:t>Волна 1 целиком — паспорта процессов и базовая линия</a:t>
             </a:r>
           </a:p>
         </p:txBody>
@@ -24154,7 +24154,7 @@
                 </a:solidFill>
                 <a:latin typeface="Golos Text"/>
               </a:rPr>
-              <a:t>1</a:t>
+              <a:t>2</a:t>
             </a:r>
           </a:p>
         </p:txBody>
@@ -24214,7 +24214,7 @@
                 </a:solidFill>
                 <a:latin typeface="Golos Text"/>
               </a:rPr>
-              <a:t>Реализация проекта</a:t>
+              <a:t>Постпроектное сопровождение</a:t>
             </a:r>
           </a:p>
         </p:txBody>
@@ -24274,7 +24274,7 @@
                 </a:solidFill>
                 <a:latin typeface="Golos Text"/>
               </a:rPr>
-              <a:t>66</a:t>
+              <a:t>68</a:t>
             </a:r>
           </a:p>
         </p:txBody>
@@ -24334,7 +24334,7 @@
                 </a:solidFill>
                 <a:latin typeface="Golos Text"/>
               </a:rPr>
-              <a:t>Закрепление владения приказом</a:t>
+              <a:t>Паспорт процесса и границы</a:t>
             </a:r>
           </a:p>
         </p:txBody>
@@ -24454,7 +24454,7 @@
                 </a:solidFill>
                 <a:latin typeface="Golos Text"/>
               </a:rPr>
-              <a:t>2</a:t>
+              <a:t>1</a:t>
             </a:r>
           </a:p>
         </p:txBody>
@@ -24514,7 +24514,7 @@
                 </a:solidFill>
                 <a:latin typeface="Golos Text"/>
               </a:rPr>
-              <a:t>Постпроектное сопровождение</a:t>
+              <a:t>Реализация проекта</a:t>
             </a:r>
           </a:p>
         </p:txBody>
@@ -24574,7 +24574,7 @@
                 </a:solidFill>
                 <a:latin typeface="Golos Text"/>
               </a:rPr>
-              <a:t>62</a:t>
+              <a:t>64</a:t>
             </a:r>
           </a:p>
         </p:txBody>
@@ -24634,7 +24634,7 @@
                 </a:solidFill>
                 <a:latin typeface="Golos Text"/>
               </a:rPr>
-              <a:t>Закрепление владения приказом</a:t>
+              <a:t>Паспорт процесса и границы</a:t>
             </a:r>
           </a:p>
         </p:txBody>
@@ -24874,7 +24874,7 @@
                 </a:solidFill>
                 <a:latin typeface="Golos Text"/>
               </a:rPr>
-              <a:t>61</a:t>
+              <a:t>64</a:t>
             </a:r>
           </a:p>
         </p:txBody>
@@ -24934,7 +24934,7 @@
                 </a:solidFill>
                 <a:latin typeface="Golos Text"/>
               </a:rPr>
-              <a:t>Закрепление владения приказом</a:t>
+              <a:t>Паспорт процесса и границы</a:t>
             </a:r>
           </a:p>
         </p:txBody>
@@ -25354,7 +25354,7 @@
                 </a:solidFill>
                 <a:latin typeface="Golos Text"/>
               </a:rPr>
-              <a:t>Б.9</a:t>
+              <a:t>4.2</a:t>
             </a:r>
           </a:p>
         </p:txBody>
@@ -25414,7 +25414,7 @@
                 </a:solidFill>
                 <a:latin typeface="Golos Text"/>
               </a:rPr>
-              <a:t>Оформление штата и кадровых приказов по проекту и…</a:t>
+              <a:t>Контроль качества и полноты проектных данных</a:t>
             </a:r>
           </a:p>
         </p:txBody>
@@ -25474,7 +25474,7 @@
                 </a:solidFill>
                 <a:latin typeface="Golos Text"/>
               </a:rPr>
-              <a:t>55</a:t>
+              <a:t>54</a:t>
             </a:r>
           </a:p>
         </p:txBody>
@@ -25534,7 +25534,7 @@
                 </a:solidFill>
                 <a:latin typeface="Golos Text"/>
               </a:rPr>
-              <a:t>SLA на стык с ЦО</a:t>
+              <a:t>Базовая линия и замер</a:t>
             </a:r>
           </a:p>
         </p:txBody>
@@ -25654,7 +25654,7 @@
                 </a:solidFill>
                 <a:latin typeface="Golos Text"/>
               </a:rPr>
-              <a:t>4.2</a:t>
+              <a:t>1.1</a:t>
             </a:r>
           </a:p>
         </p:txBody>
@@ -25714,7 +25714,7 @@
                 </a:solidFill>
                 <a:latin typeface="Golos Text"/>
               </a:rPr>
-              <a:t>Контроль качества и полноты проектных данных</a:t>
+              <a:t>Приём и валидация пакета документов от ДРБ</a:t>
             </a:r>
           </a:p>
         </p:txBody>
@@ -25774,7 +25774,7 @@
                 </a:solidFill>
                 <a:latin typeface="Golos Text"/>
               </a:rPr>
-              <a:t>54</a:t>
+              <a:t>86</a:t>
             </a:r>
           </a:p>
         </p:txBody>
@@ -25834,7 +25834,7 @@
                 </a:solidFill>
                 <a:latin typeface="Golos Text"/>
               </a:rPr>
-              <a:t>Базовая линия и замер</a:t>
+              <a:t>Регламент и чек-лист</a:t>
             </a:r>
           </a:p>
         </p:txBody>
@@ -25954,7 +25954,7 @@
                 </a:solidFill>
                 <a:latin typeface="Golos Text"/>
               </a:rPr>
-              <a:t>1.1</a:t>
+              <a:t>1.1.2</a:t>
             </a:r>
           </a:p>
         </p:txBody>
@@ -26014,7 +26014,7 @@
                 </a:solidFill>
                 <a:latin typeface="Golos Text"/>
               </a:rPr>
-              <a:t>Приём и валидация пакета документов от ДРБ</a:t>
+              <a:t>Проверка полноты пакета (договор, ФЭМ, ТЗ, адресная…</a:t>
             </a:r>
           </a:p>
         </p:txBody>
@@ -26074,7 +26074,7 @@
                 </a:solidFill>
                 <a:latin typeface="Golos Text"/>
               </a:rPr>
-              <a:t>86</a:t>
+              <a:t>85</a:t>
             </a:r>
           </a:p>
         </p:txBody>
@@ -26254,7 +26254,7 @@
                 </a:solidFill>
                 <a:latin typeface="Golos Text"/>
               </a:rPr>
-              <a:t>1.1.2</a:t>
+              <a:t>1.9</a:t>
             </a:r>
           </a:p>
         </p:txBody>
@@ -26314,7 +26314,7 @@
                 </a:solidFill>
                 <a:latin typeface="Golos Text"/>
               </a:rPr>
-              <a:t>Проверка полноты пакета (договор, ФЭМ, ТЗ, адресная…</a:t>
+              <a:t>Формирование реестра платежей и приоритизация</a:t>
             </a:r>
           </a:p>
         </p:txBody>
@@ -26374,7 +26374,7 @@
                 </a:solidFill>
                 <a:latin typeface="Golos Text"/>
               </a:rPr>
-              <a:t>85</a:t>
+              <a:t>83</a:t>
             </a:r>
           </a:p>
         </p:txBody>
@@ -26554,7 +26554,7 @@
                 </a:solidFill>
                 <a:latin typeface="Golos Text"/>
               </a:rPr>
-              <a:t>1.9</a:t>
+              <a:t>Б.6</a:t>
             </a:r>
           </a:p>
         </p:txBody>
@@ -26614,7 +26614,7 @@
                 </a:solidFill>
                 <a:latin typeface="Golos Text"/>
               </a:rPr>
-              <a:t>Формирование реестра платежей и приоритизация</a:t>
+              <a:t>Передача проекта от ДРБ в ДУП</a:t>
             </a:r>
           </a:p>
         </p:txBody>
@@ -26734,7 +26734,7 @@
                 </a:solidFill>
                 <a:latin typeface="Golos Text"/>
               </a:rPr>
-              <a:t>Регламент и чек-лист</a:t>
+              <a:t>SLA на стык с ЦО</a:t>
             </a:r>
           </a:p>
         </p:txBody>
@@ -28597,7 +28597,7 @@
                 </a:solidFill>
                 <a:latin typeface="Golos Text SemiBold"/>
               </a:rPr>
-              <a:t>Они ждут волн 2 и 3: сначала приказы и замер, иначе эффект будет не доказан, а объявлен.</a:t>
+              <a:t>Они ждут волн 2 и 3: сначала паспорт процесса и замер «до», иначе эффект будет не доказан, а объявлен.</a:t>
             </a:r>
           </a:p>
         </p:txBody>
@@ -28699,7 +28699,7 @@
                 </a:solidFill>
                 <a:latin typeface="Golos Text"/>
               </a:rPr>
-              <a:t>Шаги 1–5 доводят владение до приказа и снимают базовую линию</a:t>
+              <a:t>Шаги 1–5 задают точку отсчёта: паспорта процессов и базовая линия</a:t>
             </a:r>
           </a:p>
         </p:txBody>
@@ -29351,7 +29351,7 @@
                 </a:solidFill>
                 <a:latin typeface="Golos Text SemiBold"/>
               </a:rPr>
-              <a:t>Приказ о разделении заместителей и матрица RACI v2</a:t>
+              <a:t>Паспорт процесса реализации (блок 1)</a:t>
             </a:r>
           </a:p>
         </p:txBody>
@@ -29393,7 +29393,7 @@
                 </a:solidFill>
                 <a:latin typeface="Golos Text"/>
               </a:rPr>
-              <a:t>Результат: Приказ, целевая оргсхема и RACI v2</a:t>
+              <a:t>Результат: Паспорт процесса: границы, вход, выход, владелец и три показателя</a:t>
             </a:r>
           </a:p>
         </p:txBody>
@@ -29435,7 +29435,7 @@
                 </a:solidFill>
                 <a:latin typeface="Golos Text Medium"/>
               </a:rPr>
-              <a:t>Директор ДУП</a:t>
+              <a:t>Зам. по реализации, директор ДУП</a:t>
             </a:r>
           </a:p>
         </p:txBody>
@@ -29477,7 +29477,7 @@
                 </a:solidFill>
                 <a:latin typeface="Golos Text"/>
               </a:rPr>
-              <a:t>Фаза 1  ·  1, 2, 2.0</a:t>
+              <a:t>Фаза 1  ·  1</a:t>
             </a:r>
           </a:p>
         </p:txBody>
@@ -29625,7 +29625,7 @@
                 </a:solidFill>
                 <a:latin typeface="Golos Text SemiBold"/>
               </a:rPr>
-              <a:t>Приказ о полномочиях процессного офиса</a:t>
+              <a:t>Паспорт процесса сопровождения (блок 2)</a:t>
             </a:r>
           </a:p>
         </p:txBody>
@@ -29667,7 +29667,7 @@
                 </a:solidFill>
                 <a:latin typeface="Golos Text"/>
               </a:rPr>
-              <a:t>Результат: Приказ о полномочиях ПМО и должностная инструкция</a:t>
+              <a:t>Результат: Паспорт процесса: границы, вход, выход, владелец и три показателя</a:t>
             </a:r>
           </a:p>
         </p:txBody>
@@ -29709,7 +29709,7 @@
                 </a:solidFill>
                 <a:latin typeface="Golos Text Medium"/>
               </a:rPr>
-              <a:t>Директор ДУП</a:t>
+              <a:t>Зам. по операционной деятельности, директор ДУП</a:t>
             </a:r>
           </a:p>
         </p:txBody>
@@ -29751,7 +29751,7 @@
                 </a:solidFill>
                 <a:latin typeface="Golos Text"/>
               </a:rPr>
-              <a:t>Фаза 1  ·  4, 4.1, 4.2</a:t>
+              <a:t>Фаза 1  ·  2</a:t>
             </a:r>
           </a:p>
         </p:txBody>
@@ -29899,7 +29899,7 @@
                 </a:solidFill>
                 <a:latin typeface="Golos Text SemiBold"/>
               </a:rPr>
-              <a:t>Норматив срока оформления кадровых приказов с HR</a:t>
+              <a:t>Паспорт методологии и положение о контроле качества данных</a:t>
             </a:r>
           </a:p>
         </p:txBody>
@@ -29941,7 +29941,7 @@
                 </a:solidFill>
                 <a:latin typeface="Golos Text"/>
               </a:rPr>
-              <a:t>Результат: Соглашение с HR о сроке оформления приказов по филиалу и проекту</a:t>
+              <a:t>Результат: Положение о контроле качества и паспорт процесса 4</a:t>
             </a:r>
           </a:p>
         </p:txBody>
@@ -29983,7 +29983,7 @@
                 </a:solidFill>
                 <a:latin typeface="Golos Text Medium"/>
               </a:rPr>
-              <a:t>Директор ДУП</a:t>
+              <a:t>Главный менеджер проектов, директор ДУП</a:t>
             </a:r>
           </a:p>
         </p:txBody>
@@ -30025,7 +30025,7 @@
                 </a:solidFill>
                 <a:latin typeface="Golos Text"/>
               </a:rPr>
-              <a:t>Фаза 1  ·  Б.9</a:t>
+              <a:t>Фаза 1  ·  4, 4.2</a:t>
             </a:r>
           </a:p>
         </p:txBody>
@@ -30273,7 +30273,7 @@
                 </a:solidFill>
                 <a:latin typeface="Golos Text SemiBold"/>
               </a:rPr>
-              <a:t>Приказ о разделении заместителей и матрица RACI v2</a:t>
+              <a:t>Паспорт процесса реализации (блок 1)</a:t>
             </a:r>
           </a:p>
         </p:txBody>
@@ -30315,7 +30315,7 @@
                 </a:solidFill>
                 <a:latin typeface="Golos Text"/>
               </a:rPr>
-              <a:t>Закрывается документом: Приказ, целевая оргсхема и RACI v2</a:t>
+              <a:t>Закрывается документом: Паспорт процесса: границы, вход, выход, владелец и три показателя</a:t>
             </a:r>
           </a:p>
         </p:txBody>
@@ -30463,7 +30463,7 @@
                 </a:solidFill>
                 <a:latin typeface="Golos Text SemiBold"/>
               </a:rPr>
-              <a:t>Приказ о полномочиях процессного офиса</a:t>
+              <a:t>Паспорт процесса сопровождения (блок 2)</a:t>
             </a:r>
           </a:p>
         </p:txBody>
@@ -30505,7 +30505,7 @@
                 </a:solidFill>
                 <a:latin typeface="Golos Text"/>
               </a:rPr>
-              <a:t>Закрывается документом: Приказ о полномочиях ПМО и должностная инструкция</a:t>
+              <a:t>Закрывается документом: Паспорт процесса: границы, вход, выход, владелец и три показателя</a:t>
             </a:r>
           </a:p>
         </p:txBody>
@@ -30653,7 +30653,7 @@
                 </a:solidFill>
                 <a:latin typeface="Golos Text SemiBold"/>
               </a:rPr>
-              <a:t>Норматив срока оформления кадровых приказов с HR</a:t>
+              <a:t>Паспорт методологии и положение о контроле качества данных</a:t>
             </a:r>
           </a:p>
         </p:txBody>
@@ -30695,7 +30695,7 @@
                 </a:solidFill>
                 <a:latin typeface="Golos Text"/>
               </a:rPr>
-              <a:t>Закрывается документом: Соглашение с HR о сроке оформления приказов по филиалу и проекту</a:t>
+              <a:t>Закрывается документом: Положение о контроле качества и паспорт процесса 4</a:t>
             </a:r>
           </a:p>
         </p:txBody>
@@ -31525,7 +31525,7 @@
                 </a:solidFill>
                 <a:latin typeface="Golos Text"/>
               </a:rPr>
-              <a:t>Приказы о владении, RACI v2, целевая оргсхема</a:t>
+              <a:t>Паспорта 1, 2, 4 и чек-лист передачи</a:t>
             </a:r>
           </a:p>
         </p:txBody>
@@ -31811,7 +31811,7 @@
                 </a:solidFill>
                 <a:latin typeface="Golos Text"/>
               </a:rPr>
-              <a:t>Три новых регламента и разделение замов</a:t>
+              <a:t>Три новых регламента и SLA со смежниками</a:t>
             </a:r>
           </a:p>
         </p:txBody>
@@ -32358,7 +32358,7 @@
                 </a:solidFill>
                 <a:latin typeface="Golos Text"/>
               </a:rPr>
-              <a:t>Приоритеты, приказы о владении и полномочиях, эскалации</a:t>
+              <a:t>Приоритеты, утверждение паспортов процессов, эскалации</a:t>
             </a:r>
           </a:p>
         </p:txBody>
@@ -39736,7 +39736,7 @@
                 </a:solidFill>
                 <a:latin typeface="Golos Text SemiBold"/>
               </a:rPr>
-              <a:t>Владение раньше метрик</a:t>
+              <a:t>Паспорт процесса раньше оптимизации его шагов</a:t>
             </a:r>
           </a:p>
         </p:txBody>
@@ -39778,7 +39778,7 @@
                 </a:solidFill>
                 <a:latin typeface="Golos Text"/>
               </a:rPr>
-              <a:t>Спрашивать за результат можно только с той должности, которая есть — п. 33</a:t>
+              <a:t>Пока границы и показатели процесса не описаны, улучшать их нечем — глава 8</a:t>
             </a:r>
           </a:p>
         </p:txBody>

--- a/dup_project/02_Презентация/ДУП_Приоритеты_реинжиниринга_презентация.pptx
+++ b/dup_project/02_Презентация/ДУП_Приоритеты_реинжиниринга_презентация.pptx
@@ -18934,7 +18934,7 @@
                 </a:solidFill>
                 <a:latin typeface="Golos Text"/>
               </a:rPr>
-              <a:t>Спроектировать с нуля три процедуры, которых нет ни в одном документе</a:t>
+              <a:t>Спроектировать gate готовности продукта: процедуры нет ни в одном документе</a:t>
             </a:r>
           </a:p>
         </p:txBody>
@@ -20692,7 +20692,7 @@
                 </a:solidFill>
                 <a:latin typeface="Golos Text SemiBold"/>
               </a:rPr>
-              <a:t>Первыми берём не самые выгодные процессы, а те, что задают точку отсчёта.</a:t>
+              <a:t>Первыми берём объекты с высшим баллом, которые ДУП начинает сам.</a:t>
             </a:r>
           </a:p>
           <a:p>
@@ -20711,7 +20711,7 @@
                 </a:solidFill>
                 <a:latin typeface="Golos Text SemiBold"/>
               </a:rPr>
-              <a:t>Владение закреплено у каждого объекта. Пока нет паспорта процесса и замера «до», выгоду от оптимизации нечем доказать.</a:t>
+              <a:t>Паспорт и замер «до» идут в той же волне и очередь не держат. Договорённости со смежниками — следующая волна.</a:t>
             </a:r>
           </a:p>
         </p:txBody>
@@ -20799,7 +20799,7 @@
                 </a:solidFill>
                 <a:latin typeface="Golos Text SemiBold"/>
               </a:rPr>
-              <a:t>62</a:t>
+              <a:t>55</a:t>
             </a:r>
           </a:p>
         </p:txBody>
@@ -20841,7 +20841,7 @@
                 </a:solidFill>
                 <a:latin typeface="Golos Text"/>
               </a:rPr>
-              <a:t>объекта реестра оценены и поставлены в очередь</a:t>
+              <a:t>объектов реестра оценены и поставлены в очередь</a:t>
             </a:r>
           </a:p>
         </p:txBody>
@@ -20925,11 +20925,11 @@
             <a:r>
               <a:rPr sz="4400" b="0">
                 <a:solidFill>
-                  <a:srgbClr val="013D85"/>
+                  <a:srgbClr val="28AB6A"/>
                 </a:solidFill>
                 <a:latin typeface="Golos Text SemiBold"/>
               </a:rPr>
-              <a:t>6</a:t>
+              <a:t>25</a:t>
             </a:r>
           </a:p>
         </p:txBody>
@@ -20971,7 +20971,7 @@
                 </a:solidFill>
                 <a:latin typeface="Golos Text"/>
               </a:rPr>
-              <a:t>объектов волны 1 задают точку отсчёта: паспорт и замер</a:t>
+              <a:t>объектов волны 1: паспорта, замер и быстрые победы внутри ДУП</a:t>
             </a:r>
           </a:p>
         </p:txBody>
@@ -21059,7 +21059,7 @@
                 </a:solidFill>
                 <a:latin typeface="Golos Text SemiBold"/>
               </a:rPr>
-              <a:t>13</a:t>
+              <a:t>14</a:t>
             </a:r>
           </a:p>
         </p:txBody>
@@ -21317,7 +21317,7 @@
                 </a:solidFill>
                 <a:latin typeface="Golos Text"/>
               </a:rPr>
-              <a:t>Источник: реестр из 62 процессов, подпроцессов и этапов; оценка по 5 критериям на основании Методики KT_METHOD v1.</a:t>
+              <a:t>Источник: реестр из 55 объектов; оценка по 5 критериям на основании Методики KT_METHOD v1.</a:t>
             </a:r>
           </a:p>
         </p:txBody>
@@ -21377,7 +21377,7 @@
                 </a:solidFill>
                 <a:latin typeface="Golos Text SemiBold"/>
               </a:rPr>
-              <a:t>Четыре волны работ</a:t>
+              <a:t>Три волны работ</a:t>
             </a:r>
           </a:p>
         </p:txBody>
@@ -21419,7 +21419,7 @@
                 </a:solidFill>
                 <a:latin typeface="Golos Text"/>
               </a:rPr>
-              <a:t>Волна задаёт зависимости, балл — порядок внутри волны</a:t>
+              <a:t>Волна 1 — по убыванию балла; волны 2 и 3 ждут договорённости со смежником</a:t>
             </a:r>
           </a:p>
         </p:txBody>
@@ -21433,7 +21433,7 @@
         <p:spPr>
           <a:xfrm>
             <a:off x="397125" y="1070000"/>
-            <a:ext cx="1982437" cy="420000"/>
+            <a:ext cx="2689916" cy="420000"/>
           </a:xfrm>
           <a:prstGeom prst="roundRect">
             <a:avLst>
@@ -21441,7 +21441,7 @@
             </a:avLst>
           </a:prstGeom>
           <a:solidFill>
-            <a:srgbClr val="013D85"/>
+            <a:srgbClr val="28AB6A"/>
           </a:solidFill>
           <a:ln>
             <a:noFill/>
@@ -21495,7 +21495,7 @@
         <p:spPr>
           <a:xfrm>
             <a:off x="397125" y="1510000"/>
-            <a:ext cx="1982437" cy="1180000"/>
+            <a:ext cx="2689916" cy="1180000"/>
           </a:xfrm>
           <a:prstGeom prst="roundRect">
             <a:avLst>
@@ -21539,11 +21539,11 @@
             <a:r>
               <a:rPr sz="1050" b="0">
                 <a:solidFill>
-                  <a:srgbClr val="013D85"/>
+                  <a:srgbClr val="28AB6A"/>
                 </a:solidFill>
                 <a:latin typeface="Golos Text SemiBold"/>
               </a:rPr>
-              <a:t>Паспорта и базовая линия</a:t>
+              <a:t>Запуск: паспорта и быстрые победы</a:t>
             </a:r>
           </a:p>
           <a:p>
@@ -21562,7 +21562,7 @@
                 </a:solidFill>
                 <a:latin typeface="Golos Text"/>
               </a:rPr>
-              <a:t>Паспорта сквозных процессов и замер «до»</a:t>
+              <a:t>Паспорта, замер «до» и быстрые победы внутри ДУП</a:t>
             </a:r>
           </a:p>
         </p:txBody>
@@ -21576,7 +21576,7 @@
         <p:spPr>
           <a:xfrm>
             <a:off x="397125" y="2750000"/>
-            <a:ext cx="1982437" cy="360000"/>
+            <a:ext cx="2689916" cy="360000"/>
           </a:xfrm>
           <a:prstGeom prst="roundRect">
             <a:avLst>
@@ -21626,7 +21626,7 @@
                 </a:solidFill>
                 <a:latin typeface="Golos Text Medium"/>
               </a:rPr>
-              <a:t>6 объектов  ·  Фазы 0–1</a:t>
+              <a:t>25 объектов  ·  Старт программы</a:t>
             </a:r>
           </a:p>
         </p:txBody>
@@ -21639,8 +21639,8 @@
         </p:nvSpPr>
         <p:spPr>
           <a:xfrm>
-            <a:off x="2519562" y="1070000"/>
-            <a:ext cx="1982437" cy="420000"/>
+            <a:off x="3227041" y="1070000"/>
+            <a:ext cx="2689916" cy="420000"/>
           </a:xfrm>
           <a:prstGeom prst="roundRect">
             <a:avLst>
@@ -21648,7 +21648,7 @@
             </a:avLst>
           </a:prstGeom>
           <a:solidFill>
-            <a:srgbClr val="28AB6A"/>
+            <a:srgbClr val="FBBB05"/>
           </a:solidFill>
           <a:ln>
             <a:noFill/>
@@ -21684,7 +21684,7 @@
             <a:r>
               <a:rPr sz="1200" b="0">
                 <a:solidFill>
-                  <a:srgbClr val="FFFFFF"/>
+                  <a:srgbClr val="1E1E1E"/>
                 </a:solidFill>
                 <a:latin typeface="Golos Text SemiBold"/>
               </a:rPr>
@@ -21701,8 +21701,8 @@
         </p:nvSpPr>
         <p:spPr>
           <a:xfrm>
-            <a:off x="2519562" y="1510000"/>
-            <a:ext cx="1982437" cy="1180000"/>
+            <a:off x="3227041" y="1510000"/>
+            <a:ext cx="2689916" cy="1180000"/>
           </a:xfrm>
           <a:prstGeom prst="roundRect">
             <a:avLst>
@@ -21746,11 +21746,11 @@
             <a:r>
               <a:rPr sz="1050" b="0">
                 <a:solidFill>
-                  <a:srgbClr val="28AB6A"/>
+                  <a:srgbClr val="A87300"/>
                 </a:solidFill>
                 <a:latin typeface="Golos Text SemiBold"/>
               </a:rPr>
-              <a:t>Быстрые победы внутри ДУП</a:t>
+              <a:t>Стыки с ЦО и закрытие пробелов</a:t>
             </a:r>
           </a:p>
           <a:p>
@@ -21769,7 +21769,7 @@
                 </a:solidFill>
                 <a:latin typeface="Golos Text"/>
               </a:rPr>
-              <a:t>Восстановить исполнение там, где ДУП решает в одиночку</a:t>
+              <a:t>Договориться о стыках и спроектировать то, чего нет</a:t>
             </a:r>
           </a:p>
         </p:txBody>
@@ -21782,8 +21782,8 @@
         </p:nvSpPr>
         <p:spPr>
           <a:xfrm>
-            <a:off x="2519562" y="2750000"/>
-            <a:ext cx="1982437" cy="360000"/>
+            <a:off x="3227041" y="2750000"/>
+            <a:ext cx="2689916" cy="360000"/>
           </a:xfrm>
           <a:prstGeom prst="roundRect">
             <a:avLst>
@@ -21833,7 +21833,7 @@
                 </a:solidFill>
                 <a:latin typeface="Golos Text Medium"/>
               </a:rPr>
-              <a:t>20 объектов  ·  Фаза 2</a:t>
+              <a:t>18 объектов  ·  Стыки с центральным офисом</a:t>
             </a:r>
           </a:p>
         </p:txBody>
@@ -21846,8 +21846,8 @@
         </p:nvSpPr>
         <p:spPr>
           <a:xfrm>
-            <a:off x="4641999" y="1070000"/>
-            <a:ext cx="1982437" cy="420000"/>
+            <a:off x="6056957" y="1070000"/>
+            <a:ext cx="2689916" cy="420000"/>
           </a:xfrm>
           <a:prstGeom prst="roundRect">
             <a:avLst>
@@ -21855,7 +21855,7 @@
             </a:avLst>
           </a:prstGeom>
           <a:solidFill>
-            <a:srgbClr val="FBBB05"/>
+            <a:srgbClr val="4384F4"/>
           </a:solidFill>
           <a:ln>
             <a:noFill/>
@@ -21891,7 +21891,7 @@
             <a:r>
               <a:rPr sz="1200" b="0">
                 <a:solidFill>
-                  <a:srgbClr val="1E1E1E"/>
+                  <a:srgbClr val="FFFFFF"/>
                 </a:solidFill>
                 <a:latin typeface="Golos Text SemiBold"/>
               </a:rPr>
@@ -21908,8 +21908,8 @@
         </p:nvSpPr>
         <p:spPr>
           <a:xfrm>
-            <a:off x="4641999" y="1510000"/>
-            <a:ext cx="1982437" cy="1180000"/>
+            <a:off x="6056957" y="1510000"/>
+            <a:ext cx="2689916" cy="1180000"/>
           </a:xfrm>
           <a:prstGeom prst="roundRect">
             <a:avLst>
@@ -21953,11 +21953,11 @@
             <a:r>
               <a:rPr sz="1050" b="0">
                 <a:solidFill>
-                  <a:srgbClr val="A87300"/>
+                  <a:srgbClr val="4384F4"/>
                 </a:solidFill>
                 <a:latin typeface="Golos Text SemiBold"/>
               </a:rPr>
-              <a:t>Стыки с ЦО и закрытие пробелов</a:t>
+              <a:t>Масштаб, экономика и автоматизация</a:t>
             </a:r>
           </a:p>
           <a:p>
@@ -21976,7 +21976,7 @@
                 </a:solidFill>
                 <a:latin typeface="Golos Text"/>
               </a:rPr>
-              <a:t>Договориться о стыках и спроектировать то, чего нет</a:t>
+              <a:t>Пересмотреть экономику и закрепить результат в системах</a:t>
             </a:r>
           </a:p>
         </p:txBody>
@@ -21989,8 +21989,8 @@
         </p:nvSpPr>
         <p:spPr>
           <a:xfrm>
-            <a:off x="4641999" y="2750000"/>
-            <a:ext cx="1982437" cy="360000"/>
+            <a:off x="6056957" y="2750000"/>
+            <a:ext cx="2689916" cy="360000"/>
           </a:xfrm>
           <a:prstGeom prst="roundRect">
             <a:avLst>
@@ -22040,29 +22040,69 @@
                 </a:solidFill>
                 <a:latin typeface="Golos Text Medium"/>
               </a:rPr>
-              <a:t>24 объекта  ·  Фаза 3</a:t>
-            </a:r>
-          </a:p>
-        </p:txBody>
-      </p:sp>
-      <p:sp>
-        <p:nvSpPr>
-          <p:cNvPr id="13" name="Rounded Rectangle 12"/>
+              <a:t>8 объектов  ·  Масштаб программы</a:t>
+            </a:r>
+          </a:p>
+        </p:txBody>
+      </p:sp>
+      <p:sp>
+        <p:nvSpPr>
+          <p:cNvPr id="13" name="TextBox 12"/>
+          <p:cNvSpPr txBox="1"/>
+          <p:nvPr/>
+        </p:nvSpPr>
+        <p:spPr>
+          <a:xfrm>
+            <a:off x="397125" y="3190000"/>
+            <a:ext cx="8349750" cy="250000"/>
+          </a:xfrm>
+          <a:prstGeom prst="rect">
+            <a:avLst/>
+          </a:prstGeom>
+          <a:noFill/>
+        </p:spPr>
+        <p:txBody>
+          <a:bodyPr wrap="square" lIns="0" rIns="0" tIns="0" bIns="0" anchor="t">
+            <a:spAutoFit/>
+          </a:bodyPr>
+          <a:lstStyle/>
+          <a:p>
+            <a:pPr algn="l">
+              <a:lnSpc>
+                <a:spcPct val="115000"/>
+              </a:lnSpc>
+              <a:spcAft>
+                <a:spcPts val="0"/>
+              </a:spcAft>
+            </a:pPr>
+            <a:r>
+              <a:rPr sz="850" b="0">
+                <a:solidFill>
+                  <a:srgbClr val="A7B6BD"/>
+                </a:solidFill>
+                <a:latin typeface="Golos Text"/>
+              </a:rPr>
+              <a:t>Отдельно: 3 объекта вне очереди — исполняются другим подразделением целиком, срок контролируется через SLA по родительскому объекту.</a:t>
+            </a:r>
+          </a:p>
+        </p:txBody>
+      </p:sp>
+      <p:sp>
+        <p:nvSpPr>
+          <p:cNvPr id="14" name="Rectangle 13"/>
           <p:cNvSpPr/>
           <p:nvPr/>
         </p:nvSpPr>
         <p:spPr>
           <a:xfrm>
-            <a:off x="6764436" y="1070000"/>
-            <a:ext cx="1982437" cy="420000"/>
-          </a:xfrm>
-          <a:prstGeom prst="roundRect">
-            <a:avLst>
-              <a:gd name="adj" fmla="val 10000"/>
-            </a:avLst>
+            <a:off x="397125" y="3490000"/>
+            <a:ext cx="8349750" cy="9525"/>
+          </a:xfrm>
+          <a:prstGeom prst="rect">
+            <a:avLst/>
           </a:prstGeom>
           <a:solidFill>
-            <a:srgbClr val="4384F4"/>
+            <a:srgbClr val="D4D8E4"/>
           </a:solidFill>
           <a:ln>
             <a:noFill/>
@@ -22084,10 +22124,36 @@
           </a:fontRef>
         </p:style>
         <p:txBody>
-          <a:bodyPr rtlCol="0" anchor="ctr" lIns="110000" rIns="110000" tIns="0" bIns="0" wrap="square"/>
-          <a:lstStyle/>
-          <a:p>
-            <a:pPr algn="ctr">
+          <a:bodyPr rtlCol="0" anchor="ctr"/>
+          <a:lstStyle/>
+          <a:p>
+            <a:pPr algn="ctr"/>
+          </a:p>
+        </p:txBody>
+      </p:sp>
+      <p:sp>
+        <p:nvSpPr>
+          <p:cNvPr id="15" name="TextBox 14"/>
+          <p:cNvSpPr txBox="1"/>
+          <p:nvPr/>
+        </p:nvSpPr>
+        <p:spPr>
+          <a:xfrm>
+            <a:off x="397125" y="3520000"/>
+            <a:ext cx="8349750" cy="250000"/>
+          </a:xfrm>
+          <a:prstGeom prst="rect">
+            <a:avLst/>
+          </a:prstGeom>
+          <a:noFill/>
+        </p:spPr>
+        <p:txBody>
+          <a:bodyPr wrap="square" lIns="0" rIns="0" tIns="0" bIns="0" anchor="t">
+            <a:spAutoFit/>
+          </a:bodyPr>
+          <a:lstStyle/>
+          <a:p>
+            <a:pPr algn="l">
               <a:lnSpc>
                 <a:spcPct val="115000"/>
               </a:lnSpc>
@@ -22096,27 +22162,27 @@
               </a:spcAft>
             </a:pPr>
             <a:r>
-              <a:rPr sz="1200" b="0">
-                <a:solidFill>
-                  <a:srgbClr val="FFFFFF"/>
-                </a:solidFill>
-                <a:latin typeface="Golos Text SemiBold"/>
+              <a:rPr sz="1000" b="0">
+                <a:solidFill>
+                  <a:srgbClr val="1E1E1E"/>
+                </a:solidFill>
+                <a:latin typeface="Golos Text Medium"/>
               </a:rPr>
-              <a:t>Волна 4</a:t>
-            </a:r>
-          </a:p>
-        </p:txBody>
-      </p:sp>
-      <p:sp>
-        <p:nvSpPr>
-          <p:cNvPr id="14" name="Rounded Rectangle 13"/>
+              <a:t>Из чего состоит волна 1: 25 объектов</a:t>
+            </a:r>
+          </a:p>
+        </p:txBody>
+      </p:sp>
+      <p:sp>
+        <p:nvSpPr>
+          <p:cNvPr id="16" name="Rounded Rectangle 15"/>
           <p:cNvSpPr/>
           <p:nvPr/>
         </p:nvSpPr>
         <p:spPr>
           <a:xfrm>
-            <a:off x="6764436" y="1510000"/>
-            <a:ext cx="1982437" cy="1180000"/>
+            <a:off x="397125" y="3810000"/>
+            <a:ext cx="2689916" cy="810000"/>
           </a:xfrm>
           <a:prstGeom prst="roundRect">
             <a:avLst>
@@ -22146,249 +22212,63 @@
           </a:fontRef>
         </p:style>
         <p:txBody>
-          <a:bodyPr rtlCol="0" anchor="t" lIns="110000" rIns="110000" tIns="90000" bIns="90000" wrap="square"/>
+          <a:bodyPr rtlCol="0" anchor="t" lIns="110000" rIns="110000" tIns="80000" bIns="80000" wrap="square"/>
           <a:lstStyle/>
           <a:p>
             <a:pPr algn="l">
               <a:lnSpc>
-                <a:spcPct val="120000"/>
-              </a:lnSpc>
-              <a:spcAft>
-                <a:spcPts val="0"/>
-              </a:spcAft>
-            </a:pPr>
-            <a:r>
-              <a:rPr sz="1050" b="0">
-                <a:solidFill>
-                  <a:srgbClr val="4384F4"/>
+                <a:spcPct val="100000"/>
+              </a:lnSpc>
+            </a:pPr>
+            <a:r>
+              <a:rPr sz="1600">
+                <a:solidFill>
+                  <a:srgbClr val="013D85"/>
                 </a:solidFill>
                 <a:latin typeface="Golos Text SemiBold"/>
               </a:rPr>
-              <a:t>Масштаб, экономика и автоматизация</a:t>
+              <a:t>20</a:t>
+            </a:r>
+            <a:r>
+              <a:rPr sz="1000">
+                <a:solidFill>
+                  <a:srgbClr val="013D85"/>
+                </a:solidFill>
+                <a:latin typeface="Golos Text SemiBold"/>
+              </a:rPr>
+              <a:t>   восстанавливаем исполнение внутри ДУП</a:t>
             </a:r>
           </a:p>
           <a:p>
             <a:pPr>
               <a:lnSpc>
-                <a:spcPct val="125000"/>
+                <a:spcPct val="120000"/>
               </a:lnSpc>
               <a:spcBef>
-                <a:spcPts val="800"/>
+                <a:spcPts val="500"/>
               </a:spcBef>
             </a:pPr>
             <a:r>
-              <a:rPr sz="900">
+              <a:rPr sz="850">
                 <a:solidFill>
                   <a:srgbClr val="282828"/>
                 </a:solidFill>
                 <a:latin typeface="Golos Text"/>
               </a:rPr>
-              <a:t>Пересмотреть экономику и закрепить результат в системах</a:t>
-            </a:r>
-          </a:p>
-        </p:txBody>
-      </p:sp>
-      <p:sp>
-        <p:nvSpPr>
-          <p:cNvPr id="15" name="Rounded Rectangle 14"/>
+              <a:t>Чек-листы, регламенты и упрощение отчётности — без согласования со смежником</a:t>
+            </a:r>
+          </a:p>
+        </p:txBody>
+      </p:sp>
+      <p:sp>
+        <p:nvSpPr>
+          <p:cNvPr id="17" name="Rounded Rectangle 16"/>
           <p:cNvSpPr/>
           <p:nvPr/>
         </p:nvSpPr>
         <p:spPr>
           <a:xfrm>
-            <a:off x="6764436" y="2750000"/>
-            <a:ext cx="1982437" cy="360000"/>
-          </a:xfrm>
-          <a:prstGeom prst="roundRect">
-            <a:avLst>
-              <a:gd name="adj" fmla="val 6000"/>
-            </a:avLst>
-          </a:prstGeom>
-          <a:solidFill>
-            <a:srgbClr val="FFFFFF"/>
-          </a:solidFill>
-          <a:ln w="12700">
-            <a:solidFill>
-              <a:srgbClr val="D4D8E4"/>
-            </a:solidFill>
-          </a:ln>
-          <a:effectLst/>
-        </p:spPr>
-        <p:style>
-          <a:lnRef idx="1">
-            <a:schemeClr val="accent1"/>
-          </a:lnRef>
-          <a:fillRef idx="3">
-            <a:schemeClr val="accent1"/>
-          </a:fillRef>
-          <a:effectRef idx="2">
-            <a:schemeClr val="accent1"/>
-          </a:effectRef>
-          <a:fontRef idx="minor">
-            <a:schemeClr val="lt1"/>
-          </a:fontRef>
-        </p:style>
-        <p:txBody>
-          <a:bodyPr rtlCol="0" anchor="ctr" lIns="110000" rIns="110000" tIns="0" bIns="0" wrap="square"/>
-          <a:lstStyle/>
-          <a:p>
-            <a:pPr algn="ctr">
-              <a:lnSpc>
-                <a:spcPct val="115000"/>
-              </a:lnSpc>
-              <a:spcAft>
-                <a:spcPts val="0"/>
-              </a:spcAft>
-            </a:pPr>
-            <a:r>
-              <a:rPr sz="900" b="0">
-                <a:solidFill>
-                  <a:srgbClr val="444746"/>
-                </a:solidFill>
-                <a:latin typeface="Golos Text Medium"/>
-              </a:rPr>
-              <a:t>8 объектов  ·  Фаза 4</a:t>
-            </a:r>
-          </a:p>
-        </p:txBody>
-      </p:sp>
-      <p:sp>
-        <p:nvSpPr>
-          <p:cNvPr id="16" name="TextBox 15"/>
-          <p:cNvSpPr txBox="1"/>
-          <p:nvPr/>
-        </p:nvSpPr>
-        <p:spPr>
-          <a:xfrm>
-            <a:off x="397125" y="3190000"/>
-            <a:ext cx="8349750" cy="250000"/>
-          </a:xfrm>
-          <a:prstGeom prst="rect">
-            <a:avLst/>
-          </a:prstGeom>
-          <a:noFill/>
-        </p:spPr>
-        <p:txBody>
-          <a:bodyPr wrap="square" lIns="0" rIns="0" tIns="0" bIns="0" anchor="t">
-            <a:spAutoFit/>
-          </a:bodyPr>
-          <a:lstStyle/>
-          <a:p>
-            <a:pPr algn="l">
-              <a:lnSpc>
-                <a:spcPct val="115000"/>
-              </a:lnSpc>
-              <a:spcAft>
-                <a:spcPts val="0"/>
-              </a:spcAft>
-            </a:pPr>
-            <a:r>
-              <a:rPr sz="850" b="0">
-                <a:solidFill>
-                  <a:srgbClr val="A7B6BD"/>
-                </a:solidFill>
-                <a:latin typeface="Golos Text"/>
-              </a:rPr>
-              <a:t>Отдельно: 3 объекта вне очереди — исполняются другим подразделением целиком, срок контролируется через SLA по родительскому объекту.</a:t>
-            </a:r>
-          </a:p>
-        </p:txBody>
-      </p:sp>
-      <p:sp>
-        <p:nvSpPr>
-          <p:cNvPr id="17" name="Rectangle 16"/>
-          <p:cNvSpPr/>
-          <p:nvPr/>
-        </p:nvSpPr>
-        <p:spPr>
-          <a:xfrm>
-            <a:off x="397125" y="3490000"/>
-            <a:ext cx="8349750" cy="9525"/>
-          </a:xfrm>
-          <a:prstGeom prst="rect">
-            <a:avLst/>
-          </a:prstGeom>
-          <a:solidFill>
-            <a:srgbClr val="D4D8E4"/>
-          </a:solidFill>
-          <a:ln>
-            <a:noFill/>
-          </a:ln>
-          <a:effectLst/>
-        </p:spPr>
-        <p:style>
-          <a:lnRef idx="1">
-            <a:schemeClr val="accent1"/>
-          </a:lnRef>
-          <a:fillRef idx="3">
-            <a:schemeClr val="accent1"/>
-          </a:fillRef>
-          <a:effectRef idx="2">
-            <a:schemeClr val="accent1"/>
-          </a:effectRef>
-          <a:fontRef idx="minor">
-            <a:schemeClr val="lt1"/>
-          </a:fontRef>
-        </p:style>
-        <p:txBody>
-          <a:bodyPr rtlCol="0" anchor="ctr"/>
-          <a:lstStyle/>
-          <a:p>
-            <a:pPr algn="ctr"/>
-          </a:p>
-        </p:txBody>
-      </p:sp>
-      <p:sp>
-        <p:nvSpPr>
-          <p:cNvPr id="18" name="TextBox 17"/>
-          <p:cNvSpPr txBox="1"/>
-          <p:nvPr/>
-        </p:nvSpPr>
-        <p:spPr>
-          <a:xfrm>
-            <a:off x="397125" y="3520000"/>
-            <a:ext cx="8349750" cy="250000"/>
-          </a:xfrm>
-          <a:prstGeom prst="rect">
-            <a:avLst/>
-          </a:prstGeom>
-          <a:noFill/>
-        </p:spPr>
-        <p:txBody>
-          <a:bodyPr wrap="square" lIns="0" rIns="0" tIns="0" bIns="0" anchor="t">
-            <a:spAutoFit/>
-          </a:bodyPr>
-          <a:lstStyle/>
-          <a:p>
-            <a:pPr algn="l">
-              <a:lnSpc>
-                <a:spcPct val="115000"/>
-              </a:lnSpc>
-              <a:spcAft>
-                <a:spcPts val="0"/>
-              </a:spcAft>
-            </a:pPr>
-            <a:r>
-              <a:rPr sz="1000" b="0">
-                <a:solidFill>
-                  <a:srgbClr val="1E1E1E"/>
-                </a:solidFill>
-                <a:latin typeface="Golos Text Medium"/>
-              </a:rPr>
-              <a:t>Из чего состоит волна 1: 6 объектов</a:t>
-            </a:r>
-          </a:p>
-        </p:txBody>
-      </p:sp>
-      <p:sp>
-        <p:nvSpPr>
-          <p:cNvPr id="19" name="Rounded Rectangle 18"/>
-          <p:cNvSpPr/>
-          <p:nvPr/>
-        </p:nvSpPr>
-        <p:spPr>
-          <a:xfrm>
-            <a:off x="397125" y="3810000"/>
+            <a:off x="3227041" y="3810000"/>
             <a:ext cx="2689916" cy="810000"/>
           </a:xfrm>
           <a:prstGeom prst="roundRect">
@@ -22434,7 +22314,7 @@
                 </a:solidFill>
                 <a:latin typeface="Golos Text SemiBold"/>
               </a:rPr>
-              <a:t>3</a:t>
+              <a:t>4</a:t>
             </a:r>
             <a:r>
               <a:rPr sz="1000">
@@ -22443,7 +22323,7 @@
                 </a:solidFill>
                 <a:latin typeface="Golos Text SemiBold"/>
               </a:rPr>
-              <a:t>   описываем сквозные процессы</a:t>
+              <a:t>   описываем границы процессов</a:t>
             </a:r>
           </a:p>
           <a:p>
@@ -22462,20 +22342,20 @@
                 </a:solidFill>
                 <a:latin typeface="Golos Text"/>
               </a:rPr>
-              <a:t>Паспорта блоков 1, 2 и 4: границы, вход, выход и показатели</a:t>
-            </a:r>
-          </a:p>
-        </p:txBody>
-      </p:sp>
-      <p:sp>
-        <p:nvSpPr>
-          <p:cNvPr id="20" name="Rounded Rectangle 19"/>
+              <a:t>Паспорта блоков 1, 2 и 4 и чек-лист передачи между реализацией и сопровождением</a:t>
+            </a:r>
+          </a:p>
+        </p:txBody>
+      </p:sp>
+      <p:sp>
+        <p:nvSpPr>
+          <p:cNvPr id="18" name="Rounded Rectangle 17"/>
           <p:cNvSpPr/>
           <p:nvPr/>
         </p:nvSpPr>
         <p:spPr>
           <a:xfrm>
-            <a:off x="3227041" y="3810000"/>
+            <a:off x="6056957" y="3810000"/>
             <a:ext cx="2689916" cy="810000"/>
           </a:xfrm>
           <a:prstGeom prst="roundRect">
@@ -22522,93 +22402,6 @@
                 <a:latin typeface="Golos Text SemiBold"/>
               </a:rPr>
               <a:t>1</a:t>
-            </a:r>
-            <a:r>
-              <a:rPr sz="1000">
-                <a:solidFill>
-                  <a:srgbClr val="013D85"/>
-                </a:solidFill>
-                <a:latin typeface="Golos Text SemiBold"/>
-              </a:rPr>
-              <a:t>   фиксируем границу между блоками</a:t>
-            </a:r>
-          </a:p>
-          <a:p>
-            <a:pPr>
-              <a:lnSpc>
-                <a:spcPct val="120000"/>
-              </a:lnSpc>
-              <a:spcBef>
-                <a:spcPts val="500"/>
-              </a:spcBef>
-            </a:pPr>
-            <a:r>
-              <a:rPr sz="850">
-                <a:solidFill>
-                  <a:srgbClr val="282828"/>
-                </a:solidFill>
-                <a:latin typeface="Golos Text"/>
-              </a:rPr>
-              <a:t>Чек-лист передачи: общий выход реализации и вход сопровождения</a:t>
-            </a:r>
-          </a:p>
-        </p:txBody>
-      </p:sp>
-      <p:sp>
-        <p:nvSpPr>
-          <p:cNvPr id="21" name="Rounded Rectangle 20"/>
-          <p:cNvSpPr/>
-          <p:nvPr/>
-        </p:nvSpPr>
-        <p:spPr>
-          <a:xfrm>
-            <a:off x="6056957" y="3810000"/>
-            <a:ext cx="2689916" cy="810000"/>
-          </a:xfrm>
-          <a:prstGeom prst="roundRect">
-            <a:avLst>
-              <a:gd name="adj" fmla="val 6000"/>
-            </a:avLst>
-          </a:prstGeom>
-          <a:solidFill>
-            <a:srgbClr val="F3F3F3"/>
-          </a:solidFill>
-          <a:ln>
-            <a:noFill/>
-          </a:ln>
-          <a:effectLst/>
-        </p:spPr>
-        <p:style>
-          <a:lnRef idx="1">
-            <a:schemeClr val="accent1"/>
-          </a:lnRef>
-          <a:fillRef idx="3">
-            <a:schemeClr val="accent1"/>
-          </a:fillRef>
-          <a:effectRef idx="2">
-            <a:schemeClr val="accent1"/>
-          </a:effectRef>
-          <a:fontRef idx="minor">
-            <a:schemeClr val="lt1"/>
-          </a:fontRef>
-        </p:style>
-        <p:txBody>
-          <a:bodyPr rtlCol="0" anchor="t" lIns="110000" rIns="110000" tIns="80000" bIns="80000" wrap="square"/>
-          <a:lstStyle/>
-          <a:p>
-            <a:pPr algn="l">
-              <a:lnSpc>
-                <a:spcPct val="100000"/>
-              </a:lnSpc>
-            </a:pPr>
-            <a:r>
-              <a:rPr sz="1600">
-                <a:solidFill>
-                  <a:srgbClr val="013D85"/>
-                </a:solidFill>
-                <a:latin typeface="Golos Text SemiBold"/>
-              </a:rPr>
-              <a:t>2</a:t>
             </a:r>
             <a:r>
               <a:rPr sz="1000">
@@ -22962,7 +22755,7 @@
                 </a:solidFill>
                 <a:latin typeface="Golos Text SemiBold"/>
               </a:rPr>
-              <a:t>13</a:t>
+              <a:t>14</a:t>
             </a:r>
             <a:r>
               <a:rPr sz="1150">
@@ -23049,7 +22842,7 @@
                 </a:solidFill>
                 <a:latin typeface="Golos Text SemiBold"/>
               </a:rPr>
-              <a:t>18</a:t>
+              <a:t>13</a:t>
             </a:r>
             <a:r>
               <a:rPr sz="1150">
@@ -23217,7 +23010,7 @@
                 </a:solidFill>
                 <a:latin typeface="Golos Text SemiBold"/>
               </a:rPr>
-              <a:t>15</a:t>
+              <a:t>12</a:t>
             </a:r>
             <a:r>
               <a:rPr sz="1150">
@@ -23434,7 +23227,7 @@
                 </a:solidFill>
                 <a:latin typeface="Golos Text"/>
               </a:rPr>
-              <a:t>Волна 1 целиком — паспорта процессов и базовая линия</a:t>
+              <a:t>Волна запуска, строго по убыванию балла</a:t>
             </a:r>
           </a:p>
         </p:txBody>
@@ -23854,7 +23647,7 @@
                 </a:solidFill>
                 <a:latin typeface="Golos Text"/>
               </a:rPr>
-              <a:t>2.0</a:t>
+              <a:t>1.1</a:t>
             </a:r>
           </a:p>
         </p:txBody>
@@ -23914,7 +23707,7 @@
                 </a:solidFill>
                 <a:latin typeface="Golos Text"/>
               </a:rPr>
-              <a:t>Передача проекта «реализация → сопровождение»</a:t>
+              <a:t>Приём и валидация пакета документов от ДРБ</a:t>
             </a:r>
           </a:p>
         </p:txBody>
@@ -23974,7 +23767,7 @@
                 </a:solidFill>
                 <a:latin typeface="Golos Text"/>
               </a:rPr>
-              <a:t>64</a:t>
+              <a:t>86</a:t>
             </a:r>
           </a:p>
         </p:txBody>
@@ -24034,7 +23827,7 @@
                 </a:solidFill>
                 <a:latin typeface="Golos Text"/>
               </a:rPr>
-              <a:t>Проектирование TO-BE</a:t>
+              <a:t>Регламент и чек-лист</a:t>
             </a:r>
           </a:p>
         </p:txBody>
@@ -24154,7 +23947,7 @@
                 </a:solidFill>
                 <a:latin typeface="Golos Text"/>
               </a:rPr>
-              <a:t>2</a:t>
+              <a:t>1.9.2</a:t>
             </a:r>
           </a:p>
         </p:txBody>
@@ -24214,7 +24007,7 @@
                 </a:solidFill>
                 <a:latin typeface="Golos Text"/>
               </a:rPr>
-              <a:t>Постпроектное сопровождение</a:t>
+              <a:t>Приоритизация реестра (ВУ / КИЗ / КОЗ)</a:t>
             </a:r>
           </a:p>
         </p:txBody>
@@ -24274,7 +24067,7 @@
                 </a:solidFill>
                 <a:latin typeface="Golos Text"/>
               </a:rPr>
-              <a:t>68</a:t>
+              <a:t>86</a:t>
             </a:r>
           </a:p>
         </p:txBody>
@@ -24334,7 +24127,7 @@
                 </a:solidFill>
                 <a:latin typeface="Golos Text"/>
               </a:rPr>
-              <a:t>Паспорт процесса и границы</a:t>
+              <a:t>Регламент и чек-лист</a:t>
             </a:r>
           </a:p>
         </p:txBody>
@@ -24454,7 +24247,7 @@
                 </a:solidFill>
                 <a:latin typeface="Golos Text"/>
               </a:rPr>
-              <a:t>1</a:t>
+              <a:t>1.1.2</a:t>
             </a:r>
           </a:p>
         </p:txBody>
@@ -24514,7 +24307,7 @@
                 </a:solidFill>
                 <a:latin typeface="Golos Text"/>
               </a:rPr>
-              <a:t>Реализация проекта</a:t>
+              <a:t>Проверка полноты пакета (договор, ФЭМ, ТЗ, адресная…</a:t>
             </a:r>
           </a:p>
         </p:txBody>
@@ -24574,7 +24367,7 @@
                 </a:solidFill>
                 <a:latin typeface="Golos Text"/>
               </a:rPr>
-              <a:t>64</a:t>
+              <a:t>85</a:t>
             </a:r>
           </a:p>
         </p:txBody>
@@ -24634,7 +24427,7 @@
                 </a:solidFill>
                 <a:latin typeface="Golos Text"/>
               </a:rPr>
-              <a:t>Паспорт процесса и границы</a:t>
+              <a:t>Регламент и чек-лист</a:t>
             </a:r>
           </a:p>
         </p:txBody>
@@ -24754,7 +24547,7 @@
                 </a:solidFill>
                 <a:latin typeface="Golos Text"/>
               </a:rPr>
-              <a:t>4</a:t>
+              <a:t>1.9</a:t>
             </a:r>
           </a:p>
         </p:txBody>
@@ -24814,7 +24607,7 @@
                 </a:solidFill>
                 <a:latin typeface="Golos Text"/>
               </a:rPr>
-              <a:t>Методология и контроль качества (ПМО)</a:t>
+              <a:t>Формирование реестра платежей и приоритизация</a:t>
             </a:r>
           </a:p>
         </p:txBody>
@@ -24874,7 +24667,7 @@
                 </a:solidFill>
                 <a:latin typeface="Golos Text"/>
               </a:rPr>
-              <a:t>64</a:t>
+              <a:t>83</a:t>
             </a:r>
           </a:p>
         </p:txBody>
@@ -24934,7 +24727,7 @@
                 </a:solidFill>
                 <a:latin typeface="Golos Text"/>
               </a:rPr>
-              <a:t>Паспорт процесса и границы</a:t>
+              <a:t>Регламент и чек-лист</a:t>
             </a:r>
           </a:p>
         </p:txBody>
@@ -25054,7 +24847,7 @@
                 </a:solidFill>
                 <a:latin typeface="Golos Text"/>
               </a:rPr>
-              <a:t>4.2.1</a:t>
+              <a:t>1.7.1</a:t>
             </a:r>
           </a:p>
         </p:txBody>
@@ -25114,7 +24907,7 @@
                 </a:solidFill>
                 <a:latin typeface="Golos Text"/>
               </a:rPr>
-              <a:t>Аудит проектной документации по чек-листам</a:t>
+              <a:t>Инициация заявки, сбор спецификаций и тех. карт (со…</a:t>
             </a:r>
           </a:p>
         </p:txBody>
@@ -25174,7 +24967,7 @@
                 </a:solidFill>
                 <a:latin typeface="Golos Text"/>
               </a:rPr>
-              <a:t>57</a:t>
+              <a:t>82</a:t>
             </a:r>
           </a:p>
         </p:txBody>
@@ -25234,7 +25027,7 @@
                 </a:solidFill>
                 <a:latin typeface="Golos Text"/>
               </a:rPr>
-              <a:t>Базовая линия и замер</a:t>
+              <a:t>Регламент и чек-лист</a:t>
             </a:r>
           </a:p>
         </p:txBody>
@@ -25354,7 +25147,7 @@
                 </a:solidFill>
                 <a:latin typeface="Golos Text"/>
               </a:rPr>
-              <a:t>4.2</a:t>
+              <a:t>2.3</a:t>
             </a:r>
           </a:p>
         </p:txBody>
@@ -25414,7 +25207,7 @@
                 </a:solidFill>
                 <a:latin typeface="Golos Text"/>
               </a:rPr>
-              <a:t>Контроль качества и полноты проектных данных</a:t>
+              <a:t>Прогноз поступлений / расходов и контроль бюджета</a:t>
             </a:r>
           </a:p>
         </p:txBody>
@@ -25474,7 +25267,7 @@
                 </a:solidFill>
                 <a:latin typeface="Golos Text"/>
               </a:rPr>
-              <a:t>54</a:t>
+              <a:t>73</a:t>
             </a:r>
           </a:p>
         </p:txBody>
@@ -25534,7 +25327,7 @@
                 </a:solidFill>
                 <a:latin typeface="Golos Text"/>
               </a:rPr>
-              <a:t>Базовая линия и замер</a:t>
+              <a:t>Регламент и чек-лист</a:t>
             </a:r>
           </a:p>
         </p:txBody>
@@ -25654,7 +25447,7 @@
                 </a:solidFill>
                 <a:latin typeface="Golos Text"/>
               </a:rPr>
-              <a:t>1.1</a:t>
+              <a:t>2.3.1</a:t>
             </a:r>
           </a:p>
         </p:txBody>
@@ -25714,7 +25507,7 @@
                 </a:solidFill>
                 <a:latin typeface="Golos Text"/>
               </a:rPr>
-              <a:t>Приём и валидация пакета документов от ДРБ</a:t>
+              <a:t>Сбор данных и подтверждений по проектам</a:t>
             </a:r>
           </a:p>
         </p:txBody>
@@ -25774,7 +25567,7 @@
                 </a:solidFill>
                 <a:latin typeface="Golos Text"/>
               </a:rPr>
-              <a:t>86</a:t>
+              <a:t>72</a:t>
             </a:r>
           </a:p>
         </p:txBody>
@@ -25954,7 +25747,7 @@
                 </a:solidFill>
                 <a:latin typeface="Golos Text"/>
               </a:rPr>
-              <a:t>1.1.2</a:t>
+              <a:t>2.7</a:t>
             </a:r>
           </a:p>
         </p:txBody>
@@ -26014,7 +25807,7 @@
                 </a:solidFill>
                 <a:latin typeface="Golos Text"/>
               </a:rPr>
-              <a:t>Проверка полноты пакета (договор, ФЭМ, ТЗ, адресная…</a:t>
+              <a:t>Обратная связь по дефектам компонентов → владелец…</a:t>
             </a:r>
           </a:p>
         </p:txBody>
@@ -26074,7 +25867,7 @@
                 </a:solidFill>
                 <a:latin typeface="Golos Text"/>
               </a:rPr>
-              <a:t>85</a:t>
+              <a:t>72</a:t>
             </a:r>
           </a:p>
         </p:txBody>
@@ -26254,7 +26047,7 @@
                 </a:solidFill>
                 <a:latin typeface="Golos Text"/>
               </a:rPr>
-              <a:t>1.9</a:t>
+              <a:t>4.3</a:t>
             </a:r>
           </a:p>
         </p:txBody>
@@ -26314,7 +26107,7 @@
                 </a:solidFill>
                 <a:latin typeface="Golos Text"/>
               </a:rPr>
-              <a:t>Формирование реестра платежей и приоритизация</a:t>
+              <a:t>Отчётность по проектам</a:t>
             </a:r>
           </a:p>
         </p:txBody>
@@ -26374,7 +26167,7 @@
                 </a:solidFill>
                 <a:latin typeface="Golos Text"/>
               </a:rPr>
-              <a:t>83</a:t>
+              <a:t>71</a:t>
             </a:r>
           </a:p>
         </p:txBody>
@@ -26554,7 +26347,7 @@
                 </a:solidFill>
                 <a:latin typeface="Golos Text"/>
               </a:rPr>
-              <a:t>Б.6</a:t>
+              <a:t>4.3.1</a:t>
             </a:r>
           </a:p>
         </p:txBody>
@@ -26614,7 +26407,7 @@
                 </a:solidFill>
                 <a:latin typeface="Golos Text"/>
               </a:rPr>
-              <a:t>Передача проекта от ДРБ в ДУП</a:t>
+              <a:t>Статус-встречи по проекту</a:t>
             </a:r>
           </a:p>
         </p:txBody>
@@ -26674,7 +26467,7 @@
                 </a:solidFill>
                 <a:latin typeface="Golos Text"/>
               </a:rPr>
-              <a:t>83</a:t>
+              <a:t>71</a:t>
             </a:r>
           </a:p>
         </p:txBody>
@@ -26734,7 +26527,7 @@
                 </a:solidFill>
                 <a:latin typeface="Golos Text"/>
               </a:rPr>
-              <a:t>SLA на стык с ЦО</a:t>
+              <a:t>Регламент и чек-лист</a:t>
             </a:r>
           </a:p>
         </p:txBody>
@@ -26794,7 +26587,7 @@
                 </a:solidFill>
                 <a:latin typeface="Golos Text SemiBold"/>
               </a:rPr>
-              <a:t>Самые ценные объекты идут не первыми</a:t>
+              <a:t>Высший балл начинается сразу</a:t>
             </a:r>
           </a:p>
         </p:txBody>
@@ -26836,7 +26629,7 @@
                 </a:solidFill>
                 <a:latin typeface="Golos Text"/>
               </a:rPr>
-              <a:t>И это осознанное решение, а не недосмотр</a:t>
+              <a:t>Волна 2 держит только то, что нельзя решить внутри ДУП</a:t>
             </a:r>
           </a:p>
         </p:txBody>
@@ -27316,7 +27109,7 @@
                 </a:solidFill>
                 <a:latin typeface="Golos Text"/>
               </a:rPr>
-              <a:t>Волна 2. Быстрые победы внутри ДУП</a:t>
+              <a:t>Волна 1. Запуск: паспорта и быстрые победы</a:t>
             </a:r>
           </a:p>
         </p:txBody>
@@ -27556,7 +27349,7 @@
                 </a:solidFill>
                 <a:latin typeface="Golos Text"/>
               </a:rPr>
-              <a:t>Волна 2. Быстрые победы внутри ДУП</a:t>
+              <a:t>Волна 1. Запуск: паспорта и быстрые победы</a:t>
             </a:r>
           </a:p>
         </p:txBody>
@@ -27796,7 +27589,7 @@
                 </a:solidFill>
                 <a:latin typeface="Golos Text"/>
               </a:rPr>
-              <a:t>Волна 2. Быстрые победы внутри ДУП</a:t>
+              <a:t>Волна 1. Запуск: паспорта и быстрые победы</a:t>
             </a:r>
           </a:p>
         </p:txBody>
@@ -28036,7 +27829,7 @@
                 </a:solidFill>
                 <a:latin typeface="Golos Text"/>
               </a:rPr>
-              <a:t>Волна 3. Стыки с ЦО и закрытие пробелов</a:t>
+              <a:t>Волна 2. Стыки с ЦО и закрытие пробелов</a:t>
             </a:r>
           </a:p>
         </p:txBody>
@@ -28096,7 +27889,7 @@
                 </a:solidFill>
                 <a:latin typeface="Golos Text"/>
               </a:rPr>
-              <a:t>84</a:t>
+              <a:t>83</a:t>
             </a:r>
           </a:p>
         </p:txBody>
@@ -28156,7 +27949,7 @@
                 </a:solidFill>
                 <a:latin typeface="Golos Text"/>
               </a:rPr>
-              <a:t>Б.4</a:t>
+              <a:t>1.2</a:t>
             </a:r>
           </a:p>
         </p:txBody>
@@ -28216,7 +28009,7 @@
                 </a:solidFill>
                 <a:latin typeface="Golos Text"/>
               </a:rPr>
-              <a:t>Закупки выше упрощённого порога</a:t>
+              <a:t>Подтверждение готовности продукта (пилот)</a:t>
             </a:r>
           </a:p>
         </p:txBody>
@@ -28276,7 +28069,7 @@
                 </a:solidFill>
                 <a:latin typeface="Golos Text"/>
               </a:rPr>
-              <a:t>Волна 3. Стыки с ЦО и закрытие пробелов</a:t>
+              <a:t>Волна 2. Стыки с ЦО и закрытие пробелов</a:t>
             </a:r>
           </a:p>
         </p:txBody>
@@ -28396,7 +28189,7 @@
                 </a:solidFill>
                 <a:latin typeface="Golos Text"/>
               </a:rPr>
-              <a:t>1.2</a:t>
+              <a:t>1.5.1</a:t>
             </a:r>
           </a:p>
         </p:txBody>
@@ -28456,7 +28249,7 @@
                 </a:solidFill>
                 <a:latin typeface="Golos Text"/>
               </a:rPr>
-              <a:t>Подтверждение готовности продукта (пилот)</a:t>
+              <a:t>Формирование ФЭМ по шаблону</a:t>
             </a:r>
           </a:p>
         </p:txBody>
@@ -28516,7 +28309,7 @@
                 </a:solidFill>
                 <a:latin typeface="Golos Text"/>
               </a:rPr>
-              <a:t>Волна 3. Стыки с ЦО и закрытие пробелов</a:t>
+              <a:t>Волна 2. Стыки с ЦО и закрытие пробелов</a:t>
             </a:r>
           </a:p>
         </p:txBody>
@@ -28578,7 +28371,7 @@
                 </a:solidFill>
                 <a:latin typeface="Golos Text SemiBold"/>
               </a:rPr>
-              <a:t>Это вход проекта: приём пакета от ДРБ, приоритизация платежей, закупки и готовность продукта.</a:t>
+              <a:t>Приём пакета от ДРБ, платежи и заявка на закупку стоят в начале очереди.</a:t>
             </a:r>
           </a:p>
           <a:p>
@@ -28597,7 +28390,7 @@
                 </a:solidFill>
                 <a:latin typeface="Golos Text SemiBold"/>
               </a:rPr>
-              <a:t>Они ждут волн 2 и 3: сначала паспорт процесса и замер «до», иначе эффект будет не доказан, а объявлен.</a:t>
+              <a:t>Закупки целиком, ФЭМ и gate готовности продукта ждут волну 2: норматив ставит другое подразделение, а не паспорт процесса.</a:t>
             </a:r>
           </a:p>
         </p:txBody>
@@ -28699,7 +28492,7 @@
                 </a:solidFill>
                 <a:latin typeface="Golos Text"/>
               </a:rPr>
-              <a:t>Шаги 1–5 задают точку отсчёта: паспорта процессов и базовая линия</a:t>
+              <a:t>Шаги волны 1 стоят по убыванию балла и паспорта не ждут</a:t>
             </a:r>
           </a:p>
         </p:txBody>
@@ -28803,7 +28596,7 @@
                 </a:solidFill>
                 <a:latin typeface="Golos Text SemiBold"/>
               </a:rPr>
-              <a:t>Пилотный аудит одного филиала по трём чек-листам методологии</a:t>
+              <a:t>Чек-лист минимального пакета от ДРБ и письмо о сроке передачи</a:t>
             </a:r>
           </a:p>
         </p:txBody>
@@ -28845,7 +28638,7 @@
                 </a:solidFill>
                 <a:latin typeface="Golos Text"/>
               </a:rPr>
-              <a:t>Результат: Отчёт аудита и зафиксированная базовая линия</a:t>
+              <a:t>Результат: Чек-лист приёмки и письмо в ДРБ</a:t>
             </a:r>
           </a:p>
         </p:txBody>
@@ -28887,7 +28680,7 @@
                 </a:solidFill>
                 <a:latin typeface="Golos Text Medium"/>
               </a:rPr>
-              <a:t>Главный менеджер проектов</a:t>
+              <a:t>Зам. по реализации, директор ДУП</a:t>
             </a:r>
           </a:p>
         </p:txBody>
@@ -28929,7 +28722,7 @@
                 </a:solidFill>
                 <a:latin typeface="Golos Text"/>
               </a:rPr>
-              <a:t>Фаза 0  ·  4.2.1</a:t>
+              <a:t>Волна 1  ·  1.1, 1.1.1, 1.1.2</a:t>
             </a:r>
           </a:p>
         </p:txBody>
@@ -29077,7 +28870,7 @@
                 </a:solidFill>
                 <a:latin typeface="Golos Text SemiBold"/>
               </a:rPr>
-              <a:t>Чек-лист передачи «реализация → сопровождение»</a:t>
+              <a:t>Инструкция по трём потокам платежей ВУ / КИЗ / КОЗ</a:t>
             </a:r>
           </a:p>
         </p:txBody>
@@ -29119,7 +28912,7 @@
                 </a:solidFill>
                 <a:latin typeface="Golos Text"/>
               </a:rPr>
-              <a:t>Результат: Чек-лист передачи и обязательная дата handover в карточке проекта</a:t>
+              <a:t>Результат: Инструкция по очерёдности и единая форма реестра</a:t>
             </a:r>
           </a:p>
         </p:txBody>
@@ -29161,7 +28954,7 @@
                 </a:solidFill>
                 <a:latin typeface="Golos Text Medium"/>
               </a:rPr>
-              <a:t>Зам. по строительству и реализации</a:t>
+              <a:t>Зам. по реализации</a:t>
             </a:r>
           </a:p>
         </p:txBody>
@@ -29203,7 +28996,7 @@
                 </a:solidFill>
                 <a:latin typeface="Golos Text"/>
               </a:rPr>
-              <a:t>Фаза 1  ·  2.0</a:t>
+              <a:t>Волна 1  ·  1.9, 1.9.1, 1.9.2</a:t>
             </a:r>
           </a:p>
         </p:txBody>
@@ -29351,7 +29144,7 @@
                 </a:solidFill>
                 <a:latin typeface="Golos Text SemiBold"/>
               </a:rPr>
-              <a:t>Паспорт процесса реализации (блок 1)</a:t>
+              <a:t>Единый реестр и календарь прогноза поступлений и расходов</a:t>
             </a:r>
           </a:p>
         </p:txBody>
@@ -29393,7 +29186,7 @@
                 </a:solidFill>
                 <a:latin typeface="Golos Text"/>
               </a:rPr>
-              <a:t>Результат: Паспорт процесса: границы, вход, выход, владелец и три показателя</a:t>
+              <a:t>Результат: Реестр прогноза и календарь его обновления</a:t>
             </a:r>
           </a:p>
         </p:txBody>
@@ -29435,7 +29228,7 @@
                 </a:solidFill>
                 <a:latin typeface="Golos Text Medium"/>
               </a:rPr>
-              <a:t>Зам. по реализации, директор ДУП</a:t>
+              <a:t>Зам. по операционной деятельности</a:t>
             </a:r>
           </a:p>
         </p:txBody>
@@ -29477,7 +29270,7 @@
                 </a:solidFill>
                 <a:latin typeface="Golos Text"/>
               </a:rPr>
-              <a:t>Фаза 1  ·  1</a:t>
+              <a:t>Волна 1  ·  2.3, 2.3.1</a:t>
             </a:r>
           </a:p>
         </p:txBody>
@@ -29625,7 +29418,7 @@
                 </a:solidFill>
                 <a:latin typeface="Golos Text SemiBold"/>
               </a:rPr>
-              <a:t>Паспорт процесса сопровождения (блок 2)</a:t>
+              <a:t>Регламент статус-встреч по проектам</a:t>
             </a:r>
           </a:p>
         </p:txBody>
@@ -29667,7 +29460,7 @@
                 </a:solidFill>
                 <a:latin typeface="Golos Text"/>
               </a:rPr>
-              <a:t>Результат: Паспорт процесса: границы, вход, выход, владелец и три показателя</a:t>
+              <a:t>Результат: Регламент, шаблон повестки и протокола</a:t>
             </a:r>
           </a:p>
         </p:txBody>
@@ -29709,7 +29502,7 @@
                 </a:solidFill>
                 <a:latin typeface="Golos Text Medium"/>
               </a:rPr>
-              <a:t>Зам. по операционной деятельности, директор ДУП</a:t>
+              <a:t>Зам. по реализации</a:t>
             </a:r>
           </a:p>
         </p:txBody>
@@ -29751,7 +29544,7 @@
                 </a:solidFill>
                 <a:latin typeface="Golos Text"/>
               </a:rPr>
-              <a:t>Фаза 1  ·  2</a:t>
+              <a:t>Волна 1  ·  4.3, 4.3.1</a:t>
             </a:r>
           </a:p>
         </p:txBody>
@@ -29899,7 +29692,7 @@
                 </a:solidFill>
                 <a:latin typeface="Golos Text SemiBold"/>
               </a:rPr>
-              <a:t>Паспорт методологии и положение о контроле качества данных</a:t>
+              <a:t>Паспорт процесса сопровождения (блок 2)</a:t>
             </a:r>
           </a:p>
         </p:txBody>
@@ -29941,7 +29734,7 @@
                 </a:solidFill>
                 <a:latin typeface="Golos Text"/>
               </a:rPr>
-              <a:t>Результат: Положение о контроле качества и паспорт процесса 4</a:t>
+              <a:t>Результат: Паспорт процесса: границы, вход, выход, владелец и три показателя</a:t>
             </a:r>
           </a:p>
         </p:txBody>
@@ -29983,7 +29776,7 @@
                 </a:solidFill>
                 <a:latin typeface="Golos Text Medium"/>
               </a:rPr>
-              <a:t>Главный менеджер проектов, директор ДУП</a:t>
+              <a:t>Зам. по операционной деятельности, директор ДУП</a:t>
             </a:r>
           </a:p>
         </p:txBody>
@@ -30025,7 +29818,7 @@
                 </a:solidFill>
                 <a:latin typeface="Golos Text"/>
               </a:rPr>
-              <a:t>Фаза 1  ·  4, 4.2</a:t>
+              <a:t>Волна 1  ·  2</a:t>
             </a:r>
           </a:p>
         </p:txBody>
@@ -30067,7 +29860,7 @@
                 </a:solidFill>
                 <a:latin typeface="Golos Text"/>
               </a:rPr>
-              <a:t>Шаги 6–11 — восстановление исполнения внутри ДУП: матрица кураторов, приёмка пакета от ДРБ, платежи, статус-встречи, прогноз, переносы оборудования.</a:t>
+              <a:t>Шаги 6–11 — остальная волна 1 по убыванию балла: реестр переносов, паспорта блоков 1 и 4, чек-лист передачи, пилотный аудит и матрица кураторов.</a:t>
             </a:r>
           </a:p>
         </p:txBody>
@@ -30273,7 +30066,7 @@
                 </a:solidFill>
                 <a:latin typeface="Golos Text SemiBold"/>
               </a:rPr>
-              <a:t>Паспорт процесса реализации (блок 1)</a:t>
+              <a:t>Чек-лист минимального пакета от ДРБ и письмо о сроке передачи</a:t>
             </a:r>
           </a:p>
         </p:txBody>
@@ -30315,7 +30108,7 @@
                 </a:solidFill>
                 <a:latin typeface="Golos Text"/>
               </a:rPr>
-              <a:t>Закрывается документом: Паспорт процесса: границы, вход, выход, владелец и три показателя</a:t>
+              <a:t>Закрывается документом: Чек-лист приёмки и письмо в ДРБ</a:t>
             </a:r>
           </a:p>
         </p:txBody>
@@ -30653,7 +30446,7 @@
                 </a:solidFill>
                 <a:latin typeface="Golos Text SemiBold"/>
               </a:rPr>
-              <a:t>Паспорт методологии и положение о контроле качества данных</a:t>
+              <a:t>Паспорт процесса реализации (блок 1)</a:t>
             </a:r>
           </a:p>
         </p:txBody>
@@ -30695,7 +30488,7 @@
                 </a:solidFill>
                 <a:latin typeface="Golos Text"/>
               </a:rPr>
-              <a:t>Закрывается документом: Положение о контроле качества и паспорт процесса 4</a:t>
+              <a:t>Закрывается документом: Паспорт процесса: границы, вход, выход, владелец и три показателя</a:t>
             </a:r>
           </a:p>
         </p:txBody>
@@ -30843,7 +30636,7 @@
                 </a:solidFill>
                 <a:latin typeface="Golos Text SemiBold"/>
               </a:rPr>
-              <a:t>Утверждение матрицы «филиал → куратор»</a:t>
+              <a:t>Паспорт методологии и положение о контроле качества данных</a:t>
             </a:r>
           </a:p>
         </p:txBody>
@@ -30885,7 +30678,7 @@
                 </a:solidFill>
                 <a:latin typeface="Golos Text"/>
               </a:rPr>
-              <a:t>Закрывается документом: Утверждённая приказом матрица</a:t>
+              <a:t>Закрывается документом: Положение о контроле качества и паспорт процесса 4</a:t>
             </a:r>
           </a:p>
         </p:txBody>
@@ -31033,7 +30826,7 @@
                 </a:solidFill>
                 <a:latin typeface="Golos Text SemiBold"/>
               </a:rPr>
-              <a:t>Чек-лист минимального пакета от ДРБ и письмо о сроке передачи</a:t>
+              <a:t>Утверждение матрицы «филиал → куратор»</a:t>
             </a:r>
           </a:p>
         </p:txBody>
@@ -31075,7 +30868,7 @@
                 </a:solidFill>
                 <a:latin typeface="Golos Text"/>
               </a:rPr>
-              <a:t>Закрывается документом: Чек-лист приёмки и письмо в ДРБ</a:t>
+              <a:t>Закрывается документом: Утверждённая приказом матрица</a:t>
             </a:r>
           </a:p>
         </p:txBody>
@@ -31253,7 +31046,7 @@
         <p:spPr>
           <a:xfrm>
             <a:off x="397125" y="1010000"/>
-            <a:ext cx="1581950" cy="340000"/>
+            <a:ext cx="2689916" cy="340000"/>
           </a:xfrm>
           <a:prstGeom prst="roundRect">
             <a:avLst>
@@ -31301,7 +31094,7 @@
                 </a:solidFill>
                 <a:latin typeface="Golos Text SemiBold"/>
               </a:rPr>
-              <a:t>Фаза 0 · месяц 1</a:t>
+              <a:t>Волна 1 · месяцы 1–4</a:t>
             </a:r>
           </a:p>
         </p:txBody>
@@ -31315,7 +31108,7 @@
         <p:spPr>
           <a:xfrm>
             <a:off x="397125" y="1370000"/>
-            <a:ext cx="1581950" cy="800000"/>
+            <a:ext cx="2689916" cy="800000"/>
           </a:xfrm>
           <a:prstGeom prst="roundRect">
             <a:avLst>
@@ -31363,7 +31156,7 @@
                 </a:solidFill>
                 <a:latin typeface="Golos Text SemiBold"/>
               </a:rPr>
-              <a:t>Диагностика</a:t>
+              <a:t>Запуск</a:t>
             </a:r>
           </a:p>
           <a:p>
@@ -31382,7 +31175,7 @@
                 </a:solidFill>
                 <a:latin typeface="Golos Text"/>
               </a:rPr>
-              <a:t>Пилотный аудит филиала и базовая линия</a:t>
+              <a:t>Быстрые победы, паспорта и пилотный аудит идут параллельно</a:t>
             </a:r>
           </a:p>
         </p:txBody>
@@ -31395,8 +31188,8 @@
         </p:nvSpPr>
         <p:spPr>
           <a:xfrm>
-            <a:off x="2089075" y="1010000"/>
-            <a:ext cx="1581950" cy="340000"/>
+            <a:off x="3227041" y="1010000"/>
+            <a:ext cx="2689916" cy="340000"/>
           </a:xfrm>
           <a:prstGeom prst="roundRect">
             <a:avLst>
@@ -31444,7 +31237,7 @@
                 </a:solidFill>
                 <a:latin typeface="Golos Text SemiBold"/>
               </a:rPr>
-              <a:t>Фаза 1 · месяцы 2–3</a:t>
+              <a:t>Волна 2 · месяцы 3–8</a:t>
             </a:r>
           </a:p>
         </p:txBody>
@@ -31457,8 +31250,8 @@
         </p:nvSpPr>
         <p:spPr>
           <a:xfrm>
-            <a:off x="2089075" y="1370000"/>
-            <a:ext cx="1581950" cy="800000"/>
+            <a:off x="3227041" y="1370000"/>
+            <a:ext cx="2689916" cy="800000"/>
           </a:xfrm>
           <a:prstGeom prst="roundRect">
             <a:avLst>
@@ -31506,7 +31299,7 @@
                 </a:solidFill>
                 <a:latin typeface="Golos Text SemiBold"/>
               </a:rPr>
-              <a:t>Фундамент</a:t>
+              <a:t>Стыки</a:t>
             </a:r>
           </a:p>
           <a:p>
@@ -31525,7 +31318,7 @@
                 </a:solidFill>
                 <a:latin typeface="Golos Text"/>
               </a:rPr>
-              <a:t>Паспорта 1, 2, 4 и чек-лист передачи</a:t>
+              <a:t>SLA со смежниками, gate продукта и маршрут открытия филиала</a:t>
             </a:r>
           </a:p>
         </p:txBody>
@@ -31538,8 +31331,8 @@
         </p:nvSpPr>
         <p:spPr>
           <a:xfrm>
-            <a:off x="3781025" y="1010000"/>
-            <a:ext cx="1581950" cy="340000"/>
+            <a:off x="6056957" y="1010000"/>
+            <a:ext cx="2689916" cy="340000"/>
           </a:xfrm>
           <a:prstGeom prst="roundRect">
             <a:avLst>
@@ -31587,7 +31380,7 @@
                 </a:solidFill>
                 <a:latin typeface="Golos Text SemiBold"/>
               </a:rPr>
-              <a:t>Фаза 2 · месяцы 3–6</a:t>
+              <a:t>Волна 3 · месяцы 7–12</a:t>
             </a:r>
           </a:p>
         </p:txBody>
@@ -31600,8 +31393,8 @@
         </p:nvSpPr>
         <p:spPr>
           <a:xfrm>
-            <a:off x="3781025" y="1370000"/>
-            <a:ext cx="1581950" cy="800000"/>
+            <a:off x="6056957" y="1370000"/>
+            <a:ext cx="2689916" cy="800000"/>
           </a:xfrm>
           <a:prstGeom prst="roundRect">
             <a:avLst>
@@ -31649,7 +31442,7 @@
                 </a:solidFill>
                 <a:latin typeface="Golos Text SemiBold"/>
               </a:rPr>
-              <a:t>Исполнение</a:t>
+              <a:t>Масштаб</a:t>
             </a:r>
           </a:p>
           <a:p>
@@ -31668,29 +31461,27 @@
                 </a:solidFill>
                 <a:latin typeface="Golos Text"/>
               </a:rPr>
-              <a:t>Двенадцать процедур возвращены в работу</a:t>
-            </a:r>
-          </a:p>
-        </p:txBody>
-      </p:sp>
-      <p:sp>
-        <p:nvSpPr>
-          <p:cNvPr id="10" name="Rounded Rectangle 9"/>
+              <a:t>Экономика поверки, единая карточка проекта и автоматизация</a:t>
+            </a:r>
+          </a:p>
+        </p:txBody>
+      </p:sp>
+      <p:sp>
+        <p:nvSpPr>
+          <p:cNvPr id="10" name="Rectangle 9"/>
           <p:cNvSpPr/>
           <p:nvPr/>
         </p:nvSpPr>
         <p:spPr>
           <a:xfrm>
-            <a:off x="5472975" y="1010000"/>
-            <a:ext cx="1581950" cy="340000"/>
-          </a:xfrm>
-          <a:prstGeom prst="roundRect">
-            <a:avLst>
-              <a:gd name="adj" fmla="val 12000"/>
-            </a:avLst>
+            <a:off x="397125" y="2320000"/>
+            <a:ext cx="8349750" cy="9525"/>
+          </a:xfrm>
+          <a:prstGeom prst="rect">
+            <a:avLst/>
           </a:prstGeom>
           <a:solidFill>
-            <a:srgbClr val="4384F4"/>
+            <a:srgbClr val="D4D8E4"/>
           </a:solidFill>
           <a:ln>
             <a:noFill/>
@@ -31712,12 +31503,56 @@
           </a:fontRef>
         </p:style>
         <p:txBody>
-          <a:bodyPr rtlCol="0" anchor="ctr" lIns="110000" rIns="110000" tIns="0" bIns="0" wrap="square"/>
-          <a:lstStyle/>
-          <a:p>
-            <a:pPr algn="ctr">
-              <a:lnSpc>
-                <a:spcPct val="115000"/>
+          <a:bodyPr rtlCol="0" anchor="ctr"/>
+          <a:lstStyle/>
+          <a:p>
+            <a:pPr algn="ctr"/>
+          </a:p>
+        </p:txBody>
+      </p:sp>
+      <p:sp>
+        <p:nvSpPr>
+          <p:cNvPr id="11" name="Rectangle 10"/>
+          <p:cNvSpPr/>
+          <p:nvPr/>
+        </p:nvSpPr>
+        <p:spPr>
+          <a:xfrm>
+            <a:off x="397125" y="2470000"/>
+            <a:ext cx="1836945" cy="286000"/>
+          </a:xfrm>
+          <a:prstGeom prst="rect">
+            <a:avLst/>
+          </a:prstGeom>
+          <a:solidFill>
+            <a:srgbClr val="013D85"/>
+          </a:solidFill>
+          <a:ln>
+            <a:noFill/>
+          </a:ln>
+          <a:effectLst/>
+        </p:spPr>
+        <p:style>
+          <a:lnRef idx="1">
+            <a:schemeClr val="accent1"/>
+          </a:lnRef>
+          <a:fillRef idx="3">
+            <a:schemeClr val="accent1"/>
+          </a:fillRef>
+          <a:effectRef idx="2">
+            <a:schemeClr val="accent1"/>
+          </a:effectRef>
+          <a:fontRef idx="minor">
+            <a:schemeClr val="lt1"/>
+          </a:fontRef>
+        </p:style>
+        <p:txBody>
+          <a:bodyPr rtlCol="0" anchor="ctr" lIns="80000" rIns="80000" tIns="20000" bIns="20000" wrap="square"/>
+          <a:lstStyle/>
+          <a:p>
+            <a:pPr algn="l">
+              <a:lnSpc>
+                <a:spcPct val="105000"/>
               </a:lnSpc>
               <a:spcAft>
                 <a:spcPts val="0"/>
@@ -31730,26 +31565,324 @@
                 </a:solidFill>
                 <a:latin typeface="Golos Text SemiBold"/>
               </a:rPr>
-              <a:t>Фаза 3 · месяцы 5–8</a:t>
-            </a:r>
-          </a:p>
-        </p:txBody>
-      </p:sp>
-      <p:sp>
-        <p:nvSpPr>
-          <p:cNvPr id="11" name="Rounded Rectangle 10"/>
+              <a:t>Роль в проекте</a:t>
+            </a:r>
+          </a:p>
+        </p:txBody>
+      </p:sp>
+      <p:sp>
+        <p:nvSpPr>
+          <p:cNvPr id="12" name="Rectangle 11"/>
           <p:cNvSpPr/>
           <p:nvPr/>
         </p:nvSpPr>
         <p:spPr>
           <a:xfrm>
-            <a:off x="5472975" y="1370000"/>
-            <a:ext cx="1581950" cy="800000"/>
-          </a:xfrm>
-          <a:prstGeom prst="roundRect">
-            <a:avLst>
-              <a:gd name="adj" fmla="val 6000"/>
-            </a:avLst>
+            <a:off x="2234070" y="2470000"/>
+            <a:ext cx="2504925" cy="286000"/>
+          </a:xfrm>
+          <a:prstGeom prst="rect">
+            <a:avLst/>
+          </a:prstGeom>
+          <a:solidFill>
+            <a:srgbClr val="013D85"/>
+          </a:solidFill>
+          <a:ln>
+            <a:noFill/>
+          </a:ln>
+          <a:effectLst/>
+        </p:spPr>
+        <p:style>
+          <a:lnRef idx="1">
+            <a:schemeClr val="accent1"/>
+          </a:lnRef>
+          <a:fillRef idx="3">
+            <a:schemeClr val="accent1"/>
+          </a:fillRef>
+          <a:effectRef idx="2">
+            <a:schemeClr val="accent1"/>
+          </a:effectRef>
+          <a:fontRef idx="minor">
+            <a:schemeClr val="lt1"/>
+          </a:fontRef>
+        </p:style>
+        <p:txBody>
+          <a:bodyPr rtlCol="0" anchor="ctr" lIns="80000" rIns="80000" tIns="20000" bIns="20000" wrap="square"/>
+          <a:lstStyle/>
+          <a:p>
+            <a:pPr algn="l">
+              <a:lnSpc>
+                <a:spcPct val="105000"/>
+              </a:lnSpc>
+              <a:spcAft>
+                <a:spcPts val="0"/>
+              </a:spcAft>
+            </a:pPr>
+            <a:r>
+              <a:rPr sz="850" b="0">
+                <a:solidFill>
+                  <a:srgbClr val="FFFFFF"/>
+                </a:solidFill>
+                <a:latin typeface="Golos Text SemiBold"/>
+              </a:rPr>
+              <a:t>Кто</a:t>
+            </a:r>
+          </a:p>
+        </p:txBody>
+      </p:sp>
+      <p:sp>
+        <p:nvSpPr>
+          <p:cNvPr id="13" name="Rectangle 12"/>
+          <p:cNvSpPr/>
+          <p:nvPr/>
+        </p:nvSpPr>
+        <p:spPr>
+          <a:xfrm>
+            <a:off x="4738995" y="2470000"/>
+            <a:ext cx="4007880" cy="286000"/>
+          </a:xfrm>
+          <a:prstGeom prst="rect">
+            <a:avLst/>
+          </a:prstGeom>
+          <a:solidFill>
+            <a:srgbClr val="013D85"/>
+          </a:solidFill>
+          <a:ln>
+            <a:noFill/>
+          </a:ln>
+          <a:effectLst/>
+        </p:spPr>
+        <p:style>
+          <a:lnRef idx="1">
+            <a:schemeClr val="accent1"/>
+          </a:lnRef>
+          <a:fillRef idx="3">
+            <a:schemeClr val="accent1"/>
+          </a:fillRef>
+          <a:effectRef idx="2">
+            <a:schemeClr val="accent1"/>
+          </a:effectRef>
+          <a:fontRef idx="minor">
+            <a:schemeClr val="lt1"/>
+          </a:fontRef>
+        </p:style>
+        <p:txBody>
+          <a:bodyPr rtlCol="0" anchor="ctr" lIns="80000" rIns="80000" tIns="20000" bIns="20000" wrap="square"/>
+          <a:lstStyle/>
+          <a:p>
+            <a:pPr algn="l">
+              <a:lnSpc>
+                <a:spcPct val="105000"/>
+              </a:lnSpc>
+              <a:spcAft>
+                <a:spcPts val="0"/>
+              </a:spcAft>
+            </a:pPr>
+            <a:r>
+              <a:rPr sz="850" b="0">
+                <a:solidFill>
+                  <a:srgbClr val="FFFFFF"/>
+                </a:solidFill>
+                <a:latin typeface="Golos Text SemiBold"/>
+              </a:rPr>
+              <a:t>За что отвечает</a:t>
+            </a:r>
+          </a:p>
+        </p:txBody>
+      </p:sp>
+      <p:sp>
+        <p:nvSpPr>
+          <p:cNvPr id="14" name="Rectangle 13"/>
+          <p:cNvSpPr/>
+          <p:nvPr/>
+        </p:nvSpPr>
+        <p:spPr>
+          <a:xfrm>
+            <a:off x="397125" y="2756000"/>
+            <a:ext cx="1836945" cy="286000"/>
+          </a:xfrm>
+          <a:prstGeom prst="rect">
+            <a:avLst/>
+          </a:prstGeom>
+          <a:solidFill>
+            <a:srgbClr val="FFFFFF"/>
+          </a:solidFill>
+          <a:ln>
+            <a:noFill/>
+          </a:ln>
+          <a:effectLst/>
+        </p:spPr>
+        <p:style>
+          <a:lnRef idx="1">
+            <a:schemeClr val="accent1"/>
+          </a:lnRef>
+          <a:fillRef idx="3">
+            <a:schemeClr val="accent1"/>
+          </a:fillRef>
+          <a:effectRef idx="2">
+            <a:schemeClr val="accent1"/>
+          </a:effectRef>
+          <a:fontRef idx="minor">
+            <a:schemeClr val="lt1"/>
+          </a:fontRef>
+        </p:style>
+        <p:txBody>
+          <a:bodyPr rtlCol="0" anchor="ctr" lIns="80000" rIns="80000" tIns="20000" bIns="20000" wrap="square"/>
+          <a:lstStyle/>
+          <a:p>
+            <a:pPr algn="l">
+              <a:lnSpc>
+                <a:spcPct val="105000"/>
+              </a:lnSpc>
+              <a:spcAft>
+                <a:spcPts val="0"/>
+              </a:spcAft>
+            </a:pPr>
+            <a:r>
+              <a:rPr sz="850" b="0">
+                <a:solidFill>
+                  <a:srgbClr val="282828"/>
+                </a:solidFill>
+                <a:latin typeface="Golos Text"/>
+              </a:rPr>
+              <a:t>Заказчик и спонсор</a:t>
+            </a:r>
+          </a:p>
+        </p:txBody>
+      </p:sp>
+      <p:sp>
+        <p:nvSpPr>
+          <p:cNvPr id="15" name="Rectangle 14"/>
+          <p:cNvSpPr/>
+          <p:nvPr/>
+        </p:nvSpPr>
+        <p:spPr>
+          <a:xfrm>
+            <a:off x="2234070" y="2756000"/>
+            <a:ext cx="2504925" cy="286000"/>
+          </a:xfrm>
+          <a:prstGeom prst="rect">
+            <a:avLst/>
+          </a:prstGeom>
+          <a:solidFill>
+            <a:srgbClr val="FFFFFF"/>
+          </a:solidFill>
+          <a:ln>
+            <a:noFill/>
+          </a:ln>
+          <a:effectLst/>
+        </p:spPr>
+        <p:style>
+          <a:lnRef idx="1">
+            <a:schemeClr val="accent1"/>
+          </a:lnRef>
+          <a:fillRef idx="3">
+            <a:schemeClr val="accent1"/>
+          </a:fillRef>
+          <a:effectRef idx="2">
+            <a:schemeClr val="accent1"/>
+          </a:effectRef>
+          <a:fontRef idx="minor">
+            <a:schemeClr val="lt1"/>
+          </a:fontRef>
+        </p:style>
+        <p:txBody>
+          <a:bodyPr rtlCol="0" anchor="ctr" lIns="80000" rIns="80000" tIns="20000" bIns="20000" wrap="square"/>
+          <a:lstStyle/>
+          <a:p>
+            <a:pPr algn="l">
+              <a:lnSpc>
+                <a:spcPct val="105000"/>
+              </a:lnSpc>
+              <a:spcAft>
+                <a:spcPts val="0"/>
+              </a:spcAft>
+            </a:pPr>
+            <a:r>
+              <a:rPr sz="850" b="0">
+                <a:solidFill>
+                  <a:srgbClr val="282828"/>
+                </a:solidFill>
+                <a:latin typeface="Golos Text"/>
+              </a:rPr>
+              <a:t>Директор ДУП</a:t>
+            </a:r>
+          </a:p>
+        </p:txBody>
+      </p:sp>
+      <p:sp>
+        <p:nvSpPr>
+          <p:cNvPr id="16" name="Rectangle 15"/>
+          <p:cNvSpPr/>
+          <p:nvPr/>
+        </p:nvSpPr>
+        <p:spPr>
+          <a:xfrm>
+            <a:off x="4738995" y="2756000"/>
+            <a:ext cx="4007880" cy="286000"/>
+          </a:xfrm>
+          <a:prstGeom prst="rect">
+            <a:avLst/>
+          </a:prstGeom>
+          <a:solidFill>
+            <a:srgbClr val="FFFFFF"/>
+          </a:solidFill>
+          <a:ln>
+            <a:noFill/>
+          </a:ln>
+          <a:effectLst/>
+        </p:spPr>
+        <p:style>
+          <a:lnRef idx="1">
+            <a:schemeClr val="accent1"/>
+          </a:lnRef>
+          <a:fillRef idx="3">
+            <a:schemeClr val="accent1"/>
+          </a:fillRef>
+          <a:effectRef idx="2">
+            <a:schemeClr val="accent1"/>
+          </a:effectRef>
+          <a:fontRef idx="minor">
+            <a:schemeClr val="lt1"/>
+          </a:fontRef>
+        </p:style>
+        <p:txBody>
+          <a:bodyPr rtlCol="0" anchor="ctr" lIns="80000" rIns="80000" tIns="20000" bIns="20000" wrap="square"/>
+          <a:lstStyle/>
+          <a:p>
+            <a:pPr algn="l">
+              <a:lnSpc>
+                <a:spcPct val="105000"/>
+              </a:lnSpc>
+              <a:spcAft>
+                <a:spcPts val="0"/>
+              </a:spcAft>
+            </a:pPr>
+            <a:r>
+              <a:rPr sz="850" b="0">
+                <a:solidFill>
+                  <a:srgbClr val="282828"/>
+                </a:solidFill>
+                <a:latin typeface="Golos Text"/>
+              </a:rPr>
+              <a:t>Приоритеты, утверждение паспортов процессов, эскалации</a:t>
+            </a:r>
+          </a:p>
+        </p:txBody>
+      </p:sp>
+      <p:sp>
+        <p:nvSpPr>
+          <p:cNvPr id="17" name="Rectangle 16"/>
+          <p:cNvSpPr/>
+          <p:nvPr/>
+        </p:nvSpPr>
+        <p:spPr>
+          <a:xfrm>
+            <a:off x="397125" y="3042000"/>
+            <a:ext cx="1836945" cy="286000"/>
+          </a:xfrm>
+          <a:prstGeom prst="rect">
+            <a:avLst/>
           </a:prstGeom>
           <a:solidFill>
             <a:srgbClr val="F3F3F3"/>
@@ -31774,125 +31907,42 @@
           </a:fontRef>
         </p:style>
         <p:txBody>
-          <a:bodyPr rtlCol="0" anchor="t" lIns="110000" rIns="110000" tIns="90000" bIns="90000" wrap="square"/>
+          <a:bodyPr rtlCol="0" anchor="ctr" lIns="80000" rIns="80000" tIns="20000" bIns="20000" wrap="square"/>
           <a:lstStyle/>
           <a:p>
             <a:pPr algn="l">
               <a:lnSpc>
-                <a:spcPct val="115000"/>
-              </a:lnSpc>
-              <a:spcAft>
-                <a:spcPts val="0"/>
-              </a:spcAft>
-            </a:pPr>
-            <a:r>
-              <a:rPr sz="1000" b="0">
-                <a:solidFill>
-                  <a:srgbClr val="4384F4"/>
-                </a:solidFill>
-                <a:latin typeface="Golos Text SemiBold"/>
-              </a:rPr>
-              <a:t>Проектирование</a:t>
-            </a:r>
-          </a:p>
-          <a:p>
-            <a:pPr>
-              <a:lnSpc>
-                <a:spcPct val="125000"/>
-              </a:lnSpc>
-              <a:spcBef>
-                <a:spcPts val="500"/>
-              </a:spcBef>
-            </a:pPr>
-            <a:r>
-              <a:rPr sz="800">
+                <a:spcPct val="105000"/>
+              </a:lnSpc>
+              <a:spcAft>
+                <a:spcPts val="0"/>
+              </a:spcAft>
+            </a:pPr>
+            <a:r>
+              <a:rPr sz="850" b="0">
                 <a:solidFill>
                   <a:srgbClr val="282828"/>
                 </a:solidFill>
                 <a:latin typeface="Golos Text"/>
               </a:rPr>
-              <a:t>Три новых регламента и SLA со смежниками</a:t>
-            </a:r>
-          </a:p>
-        </p:txBody>
-      </p:sp>
-      <p:sp>
-        <p:nvSpPr>
-          <p:cNvPr id="12" name="Rounded Rectangle 11"/>
+              <a:t>Руководитель проекта</a:t>
+            </a:r>
+          </a:p>
+        </p:txBody>
+      </p:sp>
+      <p:sp>
+        <p:nvSpPr>
+          <p:cNvPr id="18" name="Rectangle 17"/>
           <p:cNvSpPr/>
           <p:nvPr/>
         </p:nvSpPr>
         <p:spPr>
           <a:xfrm>
-            <a:off x="7164925" y="1010000"/>
-            <a:ext cx="1581950" cy="340000"/>
-          </a:xfrm>
-          <a:prstGeom prst="roundRect">
-            <a:avLst>
-              <a:gd name="adj" fmla="val 12000"/>
-            </a:avLst>
-          </a:prstGeom>
-          <a:solidFill>
-            <a:srgbClr val="4384F4"/>
-          </a:solidFill>
-          <a:ln>
-            <a:noFill/>
-          </a:ln>
-          <a:effectLst/>
-        </p:spPr>
-        <p:style>
-          <a:lnRef idx="1">
-            <a:schemeClr val="accent1"/>
-          </a:lnRef>
-          <a:fillRef idx="3">
-            <a:schemeClr val="accent1"/>
-          </a:fillRef>
-          <a:effectRef idx="2">
-            <a:schemeClr val="accent1"/>
-          </a:effectRef>
-          <a:fontRef idx="minor">
-            <a:schemeClr val="lt1"/>
-          </a:fontRef>
-        </p:style>
-        <p:txBody>
-          <a:bodyPr rtlCol="0" anchor="ctr" lIns="110000" rIns="110000" tIns="0" bIns="0" wrap="square"/>
-          <a:lstStyle/>
-          <a:p>
-            <a:pPr algn="ctr">
-              <a:lnSpc>
-                <a:spcPct val="115000"/>
-              </a:lnSpc>
-              <a:spcAft>
-                <a:spcPts val="0"/>
-              </a:spcAft>
-            </a:pPr>
-            <a:r>
-              <a:rPr sz="850" b="0">
-                <a:solidFill>
-                  <a:srgbClr val="FFFFFF"/>
-                </a:solidFill>
-                <a:latin typeface="Golos Text SemiBold"/>
-              </a:rPr>
-              <a:t>Фаза 4 · месяцы 7–12</a:t>
-            </a:r>
-          </a:p>
-        </p:txBody>
-      </p:sp>
-      <p:sp>
-        <p:nvSpPr>
-          <p:cNvPr id="13" name="Rounded Rectangle 12"/>
-          <p:cNvSpPr/>
-          <p:nvPr/>
-        </p:nvSpPr>
-        <p:spPr>
-          <a:xfrm>
-            <a:off x="7164925" y="1370000"/>
-            <a:ext cx="1581950" cy="800000"/>
-          </a:xfrm>
-          <a:prstGeom prst="roundRect">
-            <a:avLst>
-              <a:gd name="adj" fmla="val 6000"/>
-            </a:avLst>
+            <a:off x="2234070" y="3042000"/>
+            <a:ext cx="2504925" cy="286000"/>
+          </a:xfrm>
+          <a:prstGeom prst="rect">
+            <a:avLst/>
           </a:prstGeom>
           <a:solidFill>
             <a:srgbClr val="F3F3F3"/>
@@ -31917,64 +31967,45 @@
           </a:fontRef>
         </p:style>
         <p:txBody>
-          <a:bodyPr rtlCol="0" anchor="t" lIns="110000" rIns="110000" tIns="90000" bIns="90000" wrap="square"/>
+          <a:bodyPr rtlCol="0" anchor="ctr" lIns="80000" rIns="80000" tIns="20000" bIns="20000" wrap="square"/>
           <a:lstStyle/>
           <a:p>
             <a:pPr algn="l">
               <a:lnSpc>
-                <a:spcPct val="115000"/>
-              </a:lnSpc>
-              <a:spcAft>
-                <a:spcPts val="0"/>
-              </a:spcAft>
-            </a:pPr>
-            <a:r>
-              <a:rPr sz="1000" b="0">
-                <a:solidFill>
-                  <a:srgbClr val="4384F4"/>
-                </a:solidFill>
-                <a:latin typeface="Golos Text SemiBold"/>
-              </a:rPr>
-              <a:t>Цифра и устойчивость</a:t>
-            </a:r>
-          </a:p>
-          <a:p>
-            <a:pPr>
-              <a:lnSpc>
-                <a:spcPct val="125000"/>
-              </a:lnSpc>
-              <a:spcBef>
-                <a:spcPts val="500"/>
-              </a:spcBef>
-            </a:pPr>
-            <a:r>
-              <a:rPr sz="800">
+                <a:spcPct val="105000"/>
+              </a:lnSpc>
+              <a:spcAft>
+                <a:spcPts val="0"/>
+              </a:spcAft>
+            </a:pPr>
+            <a:r>
+              <a:rPr sz="850" b="0">
                 <a:solidFill>
                   <a:srgbClr val="282828"/>
                 </a:solidFill>
                 <a:latin typeface="Golos Text"/>
               </a:rPr>
-              <a:t>Единая карточка проекта, ВНД v2, KPI</a:t>
-            </a:r>
-          </a:p>
-        </p:txBody>
-      </p:sp>
-      <p:sp>
-        <p:nvSpPr>
-          <p:cNvPr id="14" name="Rectangle 13"/>
+              <a:t>Назначается из ДУП / ГМП</a:t>
+            </a:r>
+          </a:p>
+        </p:txBody>
+      </p:sp>
+      <p:sp>
+        <p:nvSpPr>
+          <p:cNvPr id="19" name="Rectangle 18"/>
           <p:cNvSpPr/>
           <p:nvPr/>
         </p:nvSpPr>
         <p:spPr>
           <a:xfrm>
-            <a:off x="397125" y="2320000"/>
-            <a:ext cx="8349750" cy="9525"/>
+            <a:off x="4738995" y="3042000"/>
+            <a:ext cx="4007880" cy="286000"/>
           </a:xfrm>
           <a:prstGeom prst="rect">
             <a:avLst/>
           </a:prstGeom>
           <a:solidFill>
-            <a:srgbClr val="D4D8E4"/>
+            <a:srgbClr val="F3F3F3"/>
           </a:solidFill>
           <a:ln>
             <a:noFill/>
@@ -31996,202 +32027,38 @@
           </a:fontRef>
         </p:style>
         <p:txBody>
-          <a:bodyPr rtlCol="0" anchor="ctr"/>
-          <a:lstStyle/>
-          <a:p>
-            <a:pPr algn="ctr"/>
-          </a:p>
-        </p:txBody>
-      </p:sp>
-      <p:sp>
-        <p:nvSpPr>
-          <p:cNvPr id="15" name="Rectangle 14"/>
+          <a:bodyPr rtlCol="0" anchor="ctr" lIns="80000" rIns="80000" tIns="20000" bIns="20000" wrap="square"/>
+          <a:lstStyle/>
+          <a:p>
+            <a:pPr algn="l">
+              <a:lnSpc>
+                <a:spcPct val="105000"/>
+              </a:lnSpc>
+              <a:spcAft>
+                <a:spcPts val="0"/>
+              </a:spcAft>
+            </a:pPr>
+            <a:r>
+              <a:rPr sz="850" b="0">
+                <a:solidFill>
+                  <a:srgbClr val="282828"/>
+                </a:solidFill>
+                <a:latin typeface="Golos Text"/>
+              </a:rPr>
+              <a:t>Дорожная карта, риски, еженедельный статус</a:t>
+            </a:r>
+          </a:p>
+        </p:txBody>
+      </p:sp>
+      <p:sp>
+        <p:nvSpPr>
+          <p:cNvPr id="20" name="Rectangle 19"/>
           <p:cNvSpPr/>
           <p:nvPr/>
         </p:nvSpPr>
         <p:spPr>
           <a:xfrm>
-            <a:off x="397125" y="2470000"/>
-            <a:ext cx="1836945" cy="286000"/>
-          </a:xfrm>
-          <a:prstGeom prst="rect">
-            <a:avLst/>
-          </a:prstGeom>
-          <a:solidFill>
-            <a:srgbClr val="013D85"/>
-          </a:solidFill>
-          <a:ln>
-            <a:noFill/>
-          </a:ln>
-          <a:effectLst/>
-        </p:spPr>
-        <p:style>
-          <a:lnRef idx="1">
-            <a:schemeClr val="accent1"/>
-          </a:lnRef>
-          <a:fillRef idx="3">
-            <a:schemeClr val="accent1"/>
-          </a:fillRef>
-          <a:effectRef idx="2">
-            <a:schemeClr val="accent1"/>
-          </a:effectRef>
-          <a:fontRef idx="minor">
-            <a:schemeClr val="lt1"/>
-          </a:fontRef>
-        </p:style>
-        <p:txBody>
-          <a:bodyPr rtlCol="0" anchor="ctr" lIns="80000" rIns="80000" tIns="20000" bIns="20000" wrap="square"/>
-          <a:lstStyle/>
-          <a:p>
-            <a:pPr algn="l">
-              <a:lnSpc>
-                <a:spcPct val="105000"/>
-              </a:lnSpc>
-              <a:spcAft>
-                <a:spcPts val="0"/>
-              </a:spcAft>
-            </a:pPr>
-            <a:r>
-              <a:rPr sz="850" b="0">
-                <a:solidFill>
-                  <a:srgbClr val="FFFFFF"/>
-                </a:solidFill>
-                <a:latin typeface="Golos Text SemiBold"/>
-              </a:rPr>
-              <a:t>Роль в проекте</a:t>
-            </a:r>
-          </a:p>
-        </p:txBody>
-      </p:sp>
-      <p:sp>
-        <p:nvSpPr>
-          <p:cNvPr id="16" name="Rectangle 15"/>
-          <p:cNvSpPr/>
-          <p:nvPr/>
-        </p:nvSpPr>
-        <p:spPr>
-          <a:xfrm>
-            <a:off x="2234070" y="2470000"/>
-            <a:ext cx="2504925" cy="286000"/>
-          </a:xfrm>
-          <a:prstGeom prst="rect">
-            <a:avLst/>
-          </a:prstGeom>
-          <a:solidFill>
-            <a:srgbClr val="013D85"/>
-          </a:solidFill>
-          <a:ln>
-            <a:noFill/>
-          </a:ln>
-          <a:effectLst/>
-        </p:spPr>
-        <p:style>
-          <a:lnRef idx="1">
-            <a:schemeClr val="accent1"/>
-          </a:lnRef>
-          <a:fillRef idx="3">
-            <a:schemeClr val="accent1"/>
-          </a:fillRef>
-          <a:effectRef idx="2">
-            <a:schemeClr val="accent1"/>
-          </a:effectRef>
-          <a:fontRef idx="minor">
-            <a:schemeClr val="lt1"/>
-          </a:fontRef>
-        </p:style>
-        <p:txBody>
-          <a:bodyPr rtlCol="0" anchor="ctr" lIns="80000" rIns="80000" tIns="20000" bIns="20000" wrap="square"/>
-          <a:lstStyle/>
-          <a:p>
-            <a:pPr algn="l">
-              <a:lnSpc>
-                <a:spcPct val="105000"/>
-              </a:lnSpc>
-              <a:spcAft>
-                <a:spcPts val="0"/>
-              </a:spcAft>
-            </a:pPr>
-            <a:r>
-              <a:rPr sz="850" b="0">
-                <a:solidFill>
-                  <a:srgbClr val="FFFFFF"/>
-                </a:solidFill>
-                <a:latin typeface="Golos Text SemiBold"/>
-              </a:rPr>
-              <a:t>Кто</a:t>
-            </a:r>
-          </a:p>
-        </p:txBody>
-      </p:sp>
-      <p:sp>
-        <p:nvSpPr>
-          <p:cNvPr id="17" name="Rectangle 16"/>
-          <p:cNvSpPr/>
-          <p:nvPr/>
-        </p:nvSpPr>
-        <p:spPr>
-          <a:xfrm>
-            <a:off x="4738995" y="2470000"/>
-            <a:ext cx="4007880" cy="286000"/>
-          </a:xfrm>
-          <a:prstGeom prst="rect">
-            <a:avLst/>
-          </a:prstGeom>
-          <a:solidFill>
-            <a:srgbClr val="013D85"/>
-          </a:solidFill>
-          <a:ln>
-            <a:noFill/>
-          </a:ln>
-          <a:effectLst/>
-        </p:spPr>
-        <p:style>
-          <a:lnRef idx="1">
-            <a:schemeClr val="accent1"/>
-          </a:lnRef>
-          <a:fillRef idx="3">
-            <a:schemeClr val="accent1"/>
-          </a:fillRef>
-          <a:effectRef idx="2">
-            <a:schemeClr val="accent1"/>
-          </a:effectRef>
-          <a:fontRef idx="minor">
-            <a:schemeClr val="lt1"/>
-          </a:fontRef>
-        </p:style>
-        <p:txBody>
-          <a:bodyPr rtlCol="0" anchor="ctr" lIns="80000" rIns="80000" tIns="20000" bIns="20000" wrap="square"/>
-          <a:lstStyle/>
-          <a:p>
-            <a:pPr algn="l">
-              <a:lnSpc>
-                <a:spcPct val="105000"/>
-              </a:lnSpc>
-              <a:spcAft>
-                <a:spcPts val="0"/>
-              </a:spcAft>
-            </a:pPr>
-            <a:r>
-              <a:rPr sz="850" b="0">
-                <a:solidFill>
-                  <a:srgbClr val="FFFFFF"/>
-                </a:solidFill>
-                <a:latin typeface="Golos Text SemiBold"/>
-              </a:rPr>
-              <a:t>За что отвечает</a:t>
-            </a:r>
-          </a:p>
-        </p:txBody>
-      </p:sp>
-      <p:sp>
-        <p:nvSpPr>
-          <p:cNvPr id="18" name="Rectangle 17"/>
-          <p:cNvSpPr/>
-          <p:nvPr/>
-        </p:nvSpPr>
-        <p:spPr>
-          <a:xfrm>
-            <a:off x="397125" y="2756000"/>
+            <a:off x="397125" y="3328000"/>
             <a:ext cx="1836945" cy="286000"/>
           </a:xfrm>
           <a:prstGeom prst="rect">
@@ -32238,20 +32105,20 @@
                 </a:solidFill>
                 <a:latin typeface="Golos Text"/>
               </a:rPr>
-              <a:t>Заказчик и спонсор</a:t>
-            </a:r>
-          </a:p>
-        </p:txBody>
-      </p:sp>
-      <p:sp>
-        <p:nvSpPr>
-          <p:cNvPr id="19" name="Rectangle 18"/>
+              <a:t>Владельцы процессов</a:t>
+            </a:r>
+          </a:p>
+        </p:txBody>
+      </p:sp>
+      <p:sp>
+        <p:nvSpPr>
+          <p:cNvPr id="21" name="Rectangle 20"/>
           <p:cNvSpPr/>
           <p:nvPr/>
         </p:nvSpPr>
         <p:spPr>
           <a:xfrm>
-            <a:off x="2234070" y="2756000"/>
+            <a:off x="2234070" y="3328000"/>
             <a:ext cx="2504925" cy="286000"/>
           </a:xfrm>
           <a:prstGeom prst="rect">
@@ -32298,20 +32165,20 @@
                 </a:solidFill>
                 <a:latin typeface="Golos Text"/>
               </a:rPr>
-              <a:t>Директор ДУП</a:t>
-            </a:r>
-          </a:p>
-        </p:txBody>
-      </p:sp>
-      <p:sp>
-        <p:nvSpPr>
-          <p:cNvPr id="20" name="Rectangle 19"/>
+              <a:t>Зам. по реализации, зам. по сопровождению, ГМП</a:t>
+            </a:r>
+          </a:p>
+        </p:txBody>
+      </p:sp>
+      <p:sp>
+        <p:nvSpPr>
+          <p:cNvPr id="22" name="Rectangle 21"/>
           <p:cNvSpPr/>
           <p:nvPr/>
         </p:nvSpPr>
         <p:spPr>
           <a:xfrm>
-            <a:off x="4738995" y="2756000"/>
+            <a:off x="4738995" y="3328000"/>
             <a:ext cx="4007880" cy="286000"/>
           </a:xfrm>
           <a:prstGeom prst="rect">
@@ -32358,20 +32225,20 @@
                 </a:solidFill>
                 <a:latin typeface="Golos Text"/>
               </a:rPr>
-              <a:t>Приоритеты, утверждение паспортов процессов, эскалации</a:t>
-            </a:r>
-          </a:p>
-        </p:txBody>
-      </p:sp>
-      <p:sp>
-        <p:nvSpPr>
-          <p:cNvPr id="21" name="Rectangle 20"/>
+              <a:t>Результат своих блоков, паспорта процессов, целевые значения метрик</a:t>
+            </a:r>
+          </a:p>
+        </p:txBody>
+      </p:sp>
+      <p:sp>
+        <p:nvSpPr>
+          <p:cNvPr id="23" name="Rectangle 22"/>
           <p:cNvSpPr/>
           <p:nvPr/>
         </p:nvSpPr>
         <p:spPr>
           <a:xfrm>
-            <a:off x="397125" y="3042000"/>
+            <a:off x="397125" y="3614000"/>
             <a:ext cx="1836945" cy="286000"/>
           </a:xfrm>
           <a:prstGeom prst="rect">
@@ -32418,20 +32285,20 @@
                 </a:solidFill>
                 <a:latin typeface="Golos Text"/>
               </a:rPr>
-              <a:t>Руководитель проекта</a:t>
-            </a:r>
-          </a:p>
-        </p:txBody>
-      </p:sp>
-      <p:sp>
-        <p:nvSpPr>
-          <p:cNvPr id="22" name="Rectangle 21"/>
+              <a:t>Процессный офис (ПМО)</a:t>
+            </a:r>
+          </a:p>
+        </p:txBody>
+      </p:sp>
+      <p:sp>
+        <p:nvSpPr>
+          <p:cNvPr id="24" name="Rectangle 23"/>
           <p:cNvSpPr/>
           <p:nvPr/>
         </p:nvSpPr>
         <p:spPr>
           <a:xfrm>
-            <a:off x="2234070" y="3042000"/>
+            <a:off x="2234070" y="3614000"/>
             <a:ext cx="2504925" cy="286000"/>
           </a:xfrm>
           <a:prstGeom prst="rect">
@@ -32478,20 +32345,20 @@
                 </a:solidFill>
                 <a:latin typeface="Golos Text"/>
               </a:rPr>
-              <a:t>Назначается из ДУП / ГМП</a:t>
-            </a:r>
-          </a:p>
-        </p:txBody>
-      </p:sp>
-      <p:sp>
-        <p:nvSpPr>
-          <p:cNvPr id="23" name="Rectangle 22"/>
+              <a:t>Главный менеджер проектов</a:t>
+            </a:r>
+          </a:p>
+        </p:txBody>
+      </p:sp>
+      <p:sp>
+        <p:nvSpPr>
+          <p:cNvPr id="25" name="Rectangle 24"/>
           <p:cNvSpPr/>
           <p:nvPr/>
         </p:nvSpPr>
         <p:spPr>
           <a:xfrm>
-            <a:off x="4738995" y="3042000"/>
+            <a:off x="4738995" y="3614000"/>
             <a:ext cx="4007880" cy="286000"/>
           </a:xfrm>
           <a:prstGeom prst="rect">
@@ -32538,20 +32405,20 @@
                 </a:solidFill>
                 <a:latin typeface="Golos Text"/>
               </a:rPr>
-              <a:t>Дорожная карта, риски, еженедельный статус</a:t>
-            </a:r>
-          </a:p>
-        </p:txBody>
-      </p:sp>
-      <p:sp>
-        <p:nvSpPr>
-          <p:cNvPr id="24" name="Rectangle 23"/>
+              <a:t>Методология, аудит качества данных, реестр процессов и метрик</a:t>
+            </a:r>
+          </a:p>
+        </p:txBody>
+      </p:sp>
+      <p:sp>
+        <p:nvSpPr>
+          <p:cNvPr id="26" name="Rectangle 25"/>
           <p:cNvSpPr/>
           <p:nvPr/>
         </p:nvSpPr>
         <p:spPr>
           <a:xfrm>
-            <a:off x="397125" y="3328000"/>
+            <a:off x="397125" y="3900000"/>
             <a:ext cx="1836945" cy="286000"/>
           </a:xfrm>
           <a:prstGeom prst="rect">
@@ -32598,20 +32465,20 @@
                 </a:solidFill>
                 <a:latin typeface="Golos Text"/>
               </a:rPr>
-              <a:t>Владельцы процессов</a:t>
-            </a:r>
-          </a:p>
-        </p:txBody>
-      </p:sp>
-      <p:sp>
-        <p:nvSpPr>
-          <p:cNvPr id="25" name="Rectangle 24"/>
+              <a:t>Рабочие группы</a:t>
+            </a:r>
+          </a:p>
+        </p:txBody>
+      </p:sp>
+      <p:sp>
+        <p:nvSpPr>
+          <p:cNvPr id="27" name="Rectangle 26"/>
           <p:cNvSpPr/>
           <p:nvPr/>
         </p:nvSpPr>
         <p:spPr>
           <a:xfrm>
-            <a:off x="2234070" y="3328000"/>
+            <a:off x="2234070" y="3900000"/>
             <a:ext cx="2504925" cy="286000"/>
           </a:xfrm>
           <a:prstGeom prst="rect">
@@ -32658,20 +32525,20 @@
                 </a:solidFill>
                 <a:latin typeface="Golos Text"/>
               </a:rPr>
-              <a:t>Зам. по реализации, зам. по сопровождению, ГМП</a:t>
-            </a:r>
-          </a:p>
-        </p:txBody>
-      </p:sp>
-      <p:sp>
-        <p:nvSpPr>
-          <p:cNvPr id="26" name="Rectangle 25"/>
+              <a:t>ДУП, центральный офис, филиалы</a:t>
+            </a:r>
+          </a:p>
+        </p:txBody>
+      </p:sp>
+      <p:sp>
+        <p:nvSpPr>
+          <p:cNvPr id="28" name="Rectangle 27"/>
           <p:cNvSpPr/>
           <p:nvPr/>
         </p:nvSpPr>
         <p:spPr>
           <a:xfrm>
-            <a:off x="4738995" y="3328000"/>
+            <a:off x="4738995" y="3900000"/>
             <a:ext cx="4007880" cy="286000"/>
           </a:xfrm>
           <a:prstGeom prst="rect">
@@ -32718,366 +32585,6 @@
                 </a:solidFill>
                 <a:latin typeface="Golos Text"/>
               </a:rPr>
-              <a:t>Результат своих блоков, паспорта процессов, целевые значения метрик</a:t>
-            </a:r>
-          </a:p>
-        </p:txBody>
-      </p:sp>
-      <p:sp>
-        <p:nvSpPr>
-          <p:cNvPr id="27" name="Rectangle 26"/>
-          <p:cNvSpPr/>
-          <p:nvPr/>
-        </p:nvSpPr>
-        <p:spPr>
-          <a:xfrm>
-            <a:off x="397125" y="3614000"/>
-            <a:ext cx="1836945" cy="286000"/>
-          </a:xfrm>
-          <a:prstGeom prst="rect">
-            <a:avLst/>
-          </a:prstGeom>
-          <a:solidFill>
-            <a:srgbClr val="F3F3F3"/>
-          </a:solidFill>
-          <a:ln>
-            <a:noFill/>
-          </a:ln>
-          <a:effectLst/>
-        </p:spPr>
-        <p:style>
-          <a:lnRef idx="1">
-            <a:schemeClr val="accent1"/>
-          </a:lnRef>
-          <a:fillRef idx="3">
-            <a:schemeClr val="accent1"/>
-          </a:fillRef>
-          <a:effectRef idx="2">
-            <a:schemeClr val="accent1"/>
-          </a:effectRef>
-          <a:fontRef idx="minor">
-            <a:schemeClr val="lt1"/>
-          </a:fontRef>
-        </p:style>
-        <p:txBody>
-          <a:bodyPr rtlCol="0" anchor="ctr" lIns="80000" rIns="80000" tIns="20000" bIns="20000" wrap="square"/>
-          <a:lstStyle/>
-          <a:p>
-            <a:pPr algn="l">
-              <a:lnSpc>
-                <a:spcPct val="105000"/>
-              </a:lnSpc>
-              <a:spcAft>
-                <a:spcPts val="0"/>
-              </a:spcAft>
-            </a:pPr>
-            <a:r>
-              <a:rPr sz="850" b="0">
-                <a:solidFill>
-                  <a:srgbClr val="282828"/>
-                </a:solidFill>
-                <a:latin typeface="Golos Text"/>
-              </a:rPr>
-              <a:t>Процессный офис (ПМО)</a:t>
-            </a:r>
-          </a:p>
-        </p:txBody>
-      </p:sp>
-      <p:sp>
-        <p:nvSpPr>
-          <p:cNvPr id="28" name="Rectangle 27"/>
-          <p:cNvSpPr/>
-          <p:nvPr/>
-        </p:nvSpPr>
-        <p:spPr>
-          <a:xfrm>
-            <a:off x="2234070" y="3614000"/>
-            <a:ext cx="2504925" cy="286000"/>
-          </a:xfrm>
-          <a:prstGeom prst="rect">
-            <a:avLst/>
-          </a:prstGeom>
-          <a:solidFill>
-            <a:srgbClr val="F3F3F3"/>
-          </a:solidFill>
-          <a:ln>
-            <a:noFill/>
-          </a:ln>
-          <a:effectLst/>
-        </p:spPr>
-        <p:style>
-          <a:lnRef idx="1">
-            <a:schemeClr val="accent1"/>
-          </a:lnRef>
-          <a:fillRef idx="3">
-            <a:schemeClr val="accent1"/>
-          </a:fillRef>
-          <a:effectRef idx="2">
-            <a:schemeClr val="accent1"/>
-          </a:effectRef>
-          <a:fontRef idx="minor">
-            <a:schemeClr val="lt1"/>
-          </a:fontRef>
-        </p:style>
-        <p:txBody>
-          <a:bodyPr rtlCol="0" anchor="ctr" lIns="80000" rIns="80000" tIns="20000" bIns="20000" wrap="square"/>
-          <a:lstStyle/>
-          <a:p>
-            <a:pPr algn="l">
-              <a:lnSpc>
-                <a:spcPct val="105000"/>
-              </a:lnSpc>
-              <a:spcAft>
-                <a:spcPts val="0"/>
-              </a:spcAft>
-            </a:pPr>
-            <a:r>
-              <a:rPr sz="850" b="0">
-                <a:solidFill>
-                  <a:srgbClr val="282828"/>
-                </a:solidFill>
-                <a:latin typeface="Golos Text"/>
-              </a:rPr>
-              <a:t>Главный менеджер проектов</a:t>
-            </a:r>
-          </a:p>
-        </p:txBody>
-      </p:sp>
-      <p:sp>
-        <p:nvSpPr>
-          <p:cNvPr id="29" name="Rectangle 28"/>
-          <p:cNvSpPr/>
-          <p:nvPr/>
-        </p:nvSpPr>
-        <p:spPr>
-          <a:xfrm>
-            <a:off x="4738995" y="3614000"/>
-            <a:ext cx="4007880" cy="286000"/>
-          </a:xfrm>
-          <a:prstGeom prst="rect">
-            <a:avLst/>
-          </a:prstGeom>
-          <a:solidFill>
-            <a:srgbClr val="F3F3F3"/>
-          </a:solidFill>
-          <a:ln>
-            <a:noFill/>
-          </a:ln>
-          <a:effectLst/>
-        </p:spPr>
-        <p:style>
-          <a:lnRef idx="1">
-            <a:schemeClr val="accent1"/>
-          </a:lnRef>
-          <a:fillRef idx="3">
-            <a:schemeClr val="accent1"/>
-          </a:fillRef>
-          <a:effectRef idx="2">
-            <a:schemeClr val="accent1"/>
-          </a:effectRef>
-          <a:fontRef idx="minor">
-            <a:schemeClr val="lt1"/>
-          </a:fontRef>
-        </p:style>
-        <p:txBody>
-          <a:bodyPr rtlCol="0" anchor="ctr" lIns="80000" rIns="80000" tIns="20000" bIns="20000" wrap="square"/>
-          <a:lstStyle/>
-          <a:p>
-            <a:pPr algn="l">
-              <a:lnSpc>
-                <a:spcPct val="105000"/>
-              </a:lnSpc>
-              <a:spcAft>
-                <a:spcPts val="0"/>
-              </a:spcAft>
-            </a:pPr>
-            <a:r>
-              <a:rPr sz="850" b="0">
-                <a:solidFill>
-                  <a:srgbClr val="282828"/>
-                </a:solidFill>
-                <a:latin typeface="Golos Text"/>
-              </a:rPr>
-              <a:t>Методология, аудит качества данных, реестр процессов и метрик</a:t>
-            </a:r>
-          </a:p>
-        </p:txBody>
-      </p:sp>
-      <p:sp>
-        <p:nvSpPr>
-          <p:cNvPr id="30" name="Rectangle 29"/>
-          <p:cNvSpPr/>
-          <p:nvPr/>
-        </p:nvSpPr>
-        <p:spPr>
-          <a:xfrm>
-            <a:off x="397125" y="3900000"/>
-            <a:ext cx="1836945" cy="286000"/>
-          </a:xfrm>
-          <a:prstGeom prst="rect">
-            <a:avLst/>
-          </a:prstGeom>
-          <a:solidFill>
-            <a:srgbClr val="FFFFFF"/>
-          </a:solidFill>
-          <a:ln>
-            <a:noFill/>
-          </a:ln>
-          <a:effectLst/>
-        </p:spPr>
-        <p:style>
-          <a:lnRef idx="1">
-            <a:schemeClr val="accent1"/>
-          </a:lnRef>
-          <a:fillRef idx="3">
-            <a:schemeClr val="accent1"/>
-          </a:fillRef>
-          <a:effectRef idx="2">
-            <a:schemeClr val="accent1"/>
-          </a:effectRef>
-          <a:fontRef idx="minor">
-            <a:schemeClr val="lt1"/>
-          </a:fontRef>
-        </p:style>
-        <p:txBody>
-          <a:bodyPr rtlCol="0" anchor="ctr" lIns="80000" rIns="80000" tIns="20000" bIns="20000" wrap="square"/>
-          <a:lstStyle/>
-          <a:p>
-            <a:pPr algn="l">
-              <a:lnSpc>
-                <a:spcPct val="105000"/>
-              </a:lnSpc>
-              <a:spcAft>
-                <a:spcPts val="0"/>
-              </a:spcAft>
-            </a:pPr>
-            <a:r>
-              <a:rPr sz="850" b="0">
-                <a:solidFill>
-                  <a:srgbClr val="282828"/>
-                </a:solidFill>
-                <a:latin typeface="Golos Text"/>
-              </a:rPr>
-              <a:t>Рабочие группы</a:t>
-            </a:r>
-          </a:p>
-        </p:txBody>
-      </p:sp>
-      <p:sp>
-        <p:nvSpPr>
-          <p:cNvPr id="31" name="Rectangle 30"/>
-          <p:cNvSpPr/>
-          <p:nvPr/>
-        </p:nvSpPr>
-        <p:spPr>
-          <a:xfrm>
-            <a:off x="2234070" y="3900000"/>
-            <a:ext cx="2504925" cy="286000"/>
-          </a:xfrm>
-          <a:prstGeom prst="rect">
-            <a:avLst/>
-          </a:prstGeom>
-          <a:solidFill>
-            <a:srgbClr val="FFFFFF"/>
-          </a:solidFill>
-          <a:ln>
-            <a:noFill/>
-          </a:ln>
-          <a:effectLst/>
-        </p:spPr>
-        <p:style>
-          <a:lnRef idx="1">
-            <a:schemeClr val="accent1"/>
-          </a:lnRef>
-          <a:fillRef idx="3">
-            <a:schemeClr val="accent1"/>
-          </a:fillRef>
-          <a:effectRef idx="2">
-            <a:schemeClr val="accent1"/>
-          </a:effectRef>
-          <a:fontRef idx="minor">
-            <a:schemeClr val="lt1"/>
-          </a:fontRef>
-        </p:style>
-        <p:txBody>
-          <a:bodyPr rtlCol="0" anchor="ctr" lIns="80000" rIns="80000" tIns="20000" bIns="20000" wrap="square"/>
-          <a:lstStyle/>
-          <a:p>
-            <a:pPr algn="l">
-              <a:lnSpc>
-                <a:spcPct val="105000"/>
-              </a:lnSpc>
-              <a:spcAft>
-                <a:spcPts val="0"/>
-              </a:spcAft>
-            </a:pPr>
-            <a:r>
-              <a:rPr sz="850" b="0">
-                <a:solidFill>
-                  <a:srgbClr val="282828"/>
-                </a:solidFill>
-                <a:latin typeface="Golos Text"/>
-              </a:rPr>
-              <a:t>ДУП, центральный офис, филиалы</a:t>
-            </a:r>
-          </a:p>
-        </p:txBody>
-      </p:sp>
-      <p:sp>
-        <p:nvSpPr>
-          <p:cNvPr id="32" name="Rectangle 31"/>
-          <p:cNvSpPr/>
-          <p:nvPr/>
-        </p:nvSpPr>
-        <p:spPr>
-          <a:xfrm>
-            <a:off x="4738995" y="3900000"/>
-            <a:ext cx="4007880" cy="286000"/>
-          </a:xfrm>
-          <a:prstGeom prst="rect">
-            <a:avLst/>
-          </a:prstGeom>
-          <a:solidFill>
-            <a:srgbClr val="FFFFFF"/>
-          </a:solidFill>
-          <a:ln>
-            <a:noFill/>
-          </a:ln>
-          <a:effectLst/>
-        </p:spPr>
-        <p:style>
-          <a:lnRef idx="1">
-            <a:schemeClr val="accent1"/>
-          </a:lnRef>
-          <a:fillRef idx="3">
-            <a:schemeClr val="accent1"/>
-          </a:fillRef>
-          <a:effectRef idx="2">
-            <a:schemeClr val="accent1"/>
-          </a:effectRef>
-          <a:fontRef idx="minor">
-            <a:schemeClr val="lt1"/>
-          </a:fontRef>
-        </p:style>
-        <p:txBody>
-          <a:bodyPr rtlCol="0" anchor="ctr" lIns="80000" rIns="80000" tIns="20000" bIns="20000" wrap="square"/>
-          <a:lstStyle/>
-          <a:p>
-            <a:pPr algn="l">
-              <a:lnSpc>
-                <a:spcPct val="105000"/>
-              </a:lnSpc>
-              <a:spcAft>
-                <a:spcPts val="0"/>
-              </a:spcAft>
-            </a:pPr>
-            <a:r>
-              <a:rPr sz="850" b="0">
-                <a:solidFill>
-                  <a:srgbClr val="282828"/>
-                </a:solidFill>
-                <a:latin typeface="Golos Text"/>
-              </a:rPr>
               <a:t>Регламенты стыков, SLA, проверка решений на практике</a:t>
             </a:r>
           </a:p>
@@ -33085,7 +32592,7 @@
       </p:sp>
       <p:sp>
         <p:nvSpPr>
-          <p:cNvPr id="33" name="TextBox 32"/>
+          <p:cNvPr id="29" name="TextBox 28"/>
           <p:cNvSpPr txBox="1"/>
           <p:nvPr/>
         </p:nvSpPr>
@@ -33570,7 +33077,7 @@
                 </a:solidFill>
                 <a:latin typeface="Golos Text"/>
               </a:rPr>
-              <a:t>В компании действует Методика системы управления бизнес-процессами KT_METHOD v1. Она обязательна для всех работников (п. 4), однако процессы ДУП по ней не описаны, владельцы не закреплены по критериям, метрики не установлены.</a:t>
+              <a:t>В компании действует Методика системы управления бизнес-процессами KT_METHOD v1. Она обязательна для всех работников (п. 4). Владение по должностям уже закреплено, но паспортов процессов нет и метрики не установлены.</a:t>
             </a:r>
           </a:p>
         </p:txBody>
@@ -33744,7 +33251,7 @@
                 </a:solidFill>
                 <a:latin typeface="Golos Text"/>
               </a:rPr>
-              <a:t>На старте проекта часть процессов не была закреплена ни за одной должностью, а фактические значения не измерялись. Ни доказать эффект изменения, ни назвать виновника срыва было нечем — только мнения.</a:t>
+              <a:t>Фактические значения не измерялись. Ни доказать эффект изменения, ни назвать виновника срыва было нечем — только мнения.</a:t>
             </a:r>
           </a:p>
         </p:txBody>
@@ -34241,7 +33748,7 @@
                 </a:solidFill>
                 <a:latin typeface="Golos Text"/>
               </a:rPr>
-              <a:t>62 объекта: процессы, подпроцессы и этапы</a:t>
+              <a:t>55 объектов: процессы, подпроцессы и этапы</a:t>
             </a:r>
           </a:p>
         </p:txBody>
@@ -34409,7 +33916,7 @@
                 </a:solidFill>
                 <a:latin typeface="Golos Text"/>
               </a:rPr>
-              <a:t>423 критерия оценки с формулой и источником данных</a:t>
+              <a:t>366 критериев оценки с формулой и источником данных</a:t>
             </a:r>
           </a:p>
         </p:txBody>
@@ -34493,7 +34000,7 @@
                 </a:solidFill>
                 <a:latin typeface="Golos Text"/>
               </a:rPr>
-              <a:t>61 объект — балл, место в очереди и обоснование</a:t>
+              <a:t>54 объекта — балл, место в очереди и обоснование</a:t>
             </a:r>
           </a:p>
         </p:txBody>
@@ -38206,7 +37713,7 @@
                 </a:solidFill>
                 <a:latin typeface="Golos Text"/>
               </a:rPr>
-              <a:t>В справочнике Методики 26 метрик; по объектам реестра из них разложено 423 критерия оценки.</a:t>
+              <a:t>В справочнике Методики 26 метрик; по объектам реестра из них разложено 366 критериев оценки.</a:t>
             </a:r>
           </a:p>
           <a:p>
@@ -39632,7 +39139,7 @@
                 </a:solidFill>
                 <a:latin typeface="Golos Text"/>
               </a:rPr>
-              <a:t>Пять правил очерёдности, каждое опирается на пункт Методики</a:t>
+              <a:t>Волна 1 идёт по баллу. Дальше место в очереди задают пять правил</a:t>
             </a:r>
           </a:p>
         </p:txBody>
@@ -39736,7 +39243,7 @@
                 </a:solidFill>
                 <a:latin typeface="Golos Text SemiBold"/>
               </a:rPr>
-              <a:t>Паспорт процесса раньше оптимизации его шагов</a:t>
+              <a:t>Паспорт не держит очередь быстрых побед</a:t>
             </a:r>
           </a:p>
         </p:txBody>
@@ -39778,7 +39285,7 @@
                 </a:solidFill>
                 <a:latin typeface="Golos Text"/>
               </a:rPr>
-              <a:t>Пока границы и показатели процесса не описаны, улучшать их нечем — глава 8</a:t>
+              <a:t>Паспорт обязателен и не отодвигает объект с более высоким баллом</a:t>
             </a:r>
           </a:p>
         </p:txBody>
@@ -39926,7 +39433,7 @@
                 </a:solidFill>
                 <a:latin typeface="Golos Text SemiBold"/>
               </a:rPr>
-              <a:t>Базовая линия раньше улучшений</a:t>
+              <a:t>Базовая линия измеряет эффект и не держит старт</a:t>
             </a:r>
           </a:p>
         </p:txBody>
@@ -39968,7 +39475,7 @@
                 </a:solidFill>
                 <a:latin typeface="Golos Text"/>
               </a:rPr>
-              <a:t>Без замера «до» эффект будет предметом спора, а не расчёта — п. 176</a:t>
+              <a:t>Замер «до» доказывает эффект и не блокирует соседние работы — п. 176</a:t>
             </a:r>
           </a:p>
         </p:txBody>
@@ -40702,7 +40209,7 @@
                 </a:solidFill>
                 <a:latin typeface="Golos Text SemiBold"/>
               </a:rPr>
-              <a:t>28</a:t>
+              <a:t>23</a:t>
             </a:r>
           </a:p>
         </p:txBody>
@@ -40744,7 +40251,7 @@
                 </a:solidFill>
                 <a:latin typeface="Golos Text SemiBold"/>
               </a:rPr>
-              <a:t>объектов из 62 описаны, но не исполняются</a:t>
+              <a:t>объекта из 55 описаны, но не исполняются</a:t>
             </a:r>
           </a:p>
         </p:txBody>
@@ -40892,7 +40399,7 @@
                 </a:solidFill>
                 <a:latin typeface="Golos Text SemiBold"/>
               </a:rPr>
-              <a:t>3</a:t>
+              <a:t>2</a:t>
             </a:r>
           </a:p>
         </p:txBody>
@@ -40976,7 +40483,7 @@
                 </a:solidFill>
                 <a:latin typeface="Golos Text"/>
               </a:rPr>
-              <a:t>Готовность продукта, передача в сопровождение и открытие филиала решаются каждый раз заново и доходят до директора.</a:t>
+              <a:t>Подтверждение готовности продукта и проверка завершения пилота решаются каждый раз заново и доходят до директора.</a:t>
             </a:r>
           </a:p>
         </p:txBody>
@@ -41124,7 +40631,7 @@
                 </a:solidFill>
                 <a:latin typeface="Golos Text SemiBold"/>
               </a:rPr>
-              <a:t>критериев из 423 измеряется сегодня</a:t>
+              <a:t>критериев из 366 измеряется сегодня</a:t>
             </a:r>
           </a:p>
         </p:txBody>
@@ -41811,7 +41318,7 @@
                 </a:solidFill>
                 <a:latin typeface="Golos Text Medium"/>
               </a:rPr>
-              <a:t>Начинаем с ответственности и замера — дальше очередь считается сама</a:t>
+              <a:t>Начинаем с высшего балла внутри ДУП — паспорт очередь не держит</a:t>
             </a:r>
             <a:endParaRPr sz="2400">
               <a:solidFill>
